--- a/fafana_2025-07-23.pptx
+++ b/fafana_2025-07-23.pptx
@@ -3181,7 +3181,7 @@
                 </a:solidFill>
                 <a:latin typeface="Verdana"/>
               </a:rPr>
-              <a:t>1. </a:t>
+              <a:t>1- </a:t>
             </a:r>
             <a:r>
               <a:rPr lang="en-US" sz="4500" b="true">
@@ -3355,23 +3355,20 @@
             <a:r>
               <a:rPr lang="en-US" sz="4500" b="true">
                 <a:solidFill>
-                  <a:srgbClr val="FFFFFF"/>
-                </a:solidFill>
-                <a:latin typeface="Verdana"/>
-              </a:rPr>
-              <a:t>Fiverenana</a:t>
-            </a:r>
-          </a:p>
-          <a:p>
-            <a:pPr algn="ctr"/>
-            <a:r>
-              <a:rPr lang="en-US" sz="4500" b="true">
-                <a:solidFill>
-                  <a:srgbClr val="FFFFFF"/>
-                </a:solidFill>
-                <a:latin typeface="Verdana"/>
-              </a:rPr>
-              <a:t>Na onena ny fonao</a:t>
+                  <a:srgbClr val="FFCC00"/>
+                </a:solidFill>
+                <a:latin typeface="Verdana"/>
+              </a:rPr>
+              <a:t>Fiv:</a:t>
+            </a:r>
+            <a:r>
+              <a:rPr lang="en-US" sz="4500" b="true">
+                <a:solidFill>
+                  <a:srgbClr val="FFFFFF"/>
+                </a:solidFill>
+                <a:latin typeface="Verdana"/>
+              </a:rPr>
+              <a:t> Na onena ny fonao</a:t>
             </a:r>
           </a:p>
           <a:p>
@@ -3540,7 +3537,7 @@
                 </a:solidFill>
                 <a:latin typeface="Verdana"/>
               </a:rPr>
-              <a:t>2. </a:t>
+              <a:t>2- </a:t>
             </a:r>
             <a:r>
               <a:rPr lang="en-US" sz="4500" b="true">
@@ -3718,7 +3715,7 @@
                 </a:solidFill>
                 <a:latin typeface="Verdana"/>
               </a:rPr>
-              <a:t> :,: Inty tamy aho, </a:t>
+              <a:t>:,: Inty tamy aho,</a:t>
             </a:r>
           </a:p>
           <a:p>
@@ -3875,7 +3872,7 @@
                 </a:solidFill>
                 <a:latin typeface="Verdana"/>
               </a:rPr>
-              <a:t>1. </a:t>
+              <a:t>1- </a:t>
             </a:r>
             <a:r>
               <a:rPr lang="en-US" sz="4500" b="true">
@@ -4222,7 +4219,7 @@
                 </a:solidFill>
                 <a:latin typeface="Verdana"/>
               </a:rPr>
-              <a:t>2. </a:t>
+              <a:t>2- </a:t>
             </a:r>
             <a:r>
               <a:rPr lang="en-US" sz="4500" b="true">
@@ -4569,7 +4566,7 @@
                 </a:solidFill>
                 <a:latin typeface="Verdana"/>
               </a:rPr>
-              <a:t>3. </a:t>
+              <a:t>3- </a:t>
             </a:r>
             <a:r>
               <a:rPr lang="en-US" sz="4500" b="true">
@@ -4590,19 +4587,19 @@
                 </a:solidFill>
                 <a:latin typeface="Verdana"/>
               </a:rPr>
-              <a:t>Fara-fanasana anao; </a:t>
-            </a:r>
-          </a:p>
-          <a:p>
-            <a:pPr algn="ctr"/>
-            <a:r>
-              <a:rPr lang="en-US" sz="4500" b="true">
-                <a:solidFill>
-                  <a:srgbClr val="FFFFFF"/>
-                </a:solidFill>
-                <a:latin typeface="Verdana"/>
-              </a:rPr>
-              <a:t>Sao anio no fotoana </a:t>
+              <a:t>Fara-fanasana anao;</a:t>
+            </a:r>
+          </a:p>
+          <a:p>
+            <a:pPr algn="ctr"/>
+            <a:r>
+              <a:rPr lang="en-US" sz="4500" b="true">
+                <a:solidFill>
+                  <a:srgbClr val="FFFFFF"/>
+                </a:solidFill>
+                <a:latin typeface="Verdana"/>
+              </a:rPr>
+              <a:t>Sao anio no fotoana</a:t>
             </a:r>
           </a:p>
           <a:p>
@@ -4747,31 +4744,31 @@
                 </a:solidFill>
                 <a:latin typeface="Verdana"/>
               </a:rPr>
-              <a:t>Ka aza mba misalasala, </a:t>
-            </a:r>
-          </a:p>
-          <a:p>
-            <a:pPr algn="ctr"/>
-            <a:r>
-              <a:rPr lang="en-US" sz="4500" b="true">
-                <a:solidFill>
-                  <a:srgbClr val="FFFFFF"/>
-                </a:solidFill>
-                <a:latin typeface="Verdana"/>
-              </a:rPr>
-              <a:t>Sao manjary neninao, </a:t>
-            </a:r>
-          </a:p>
-          <a:p>
-            <a:pPr algn="ctr"/>
-            <a:r>
-              <a:rPr lang="en-US" sz="4500" b="true">
-                <a:solidFill>
-                  <a:srgbClr val="FFFFFF"/>
-                </a:solidFill>
-                <a:latin typeface="Verdana"/>
-              </a:rPr>
-              <a:t>Raha tsy mety mahalala </a:t>
+              <a:t>Ka aza mba misalasala,</a:t>
+            </a:r>
+          </a:p>
+          <a:p>
+            <a:pPr algn="ctr"/>
+            <a:r>
+              <a:rPr lang="en-US" sz="4500" b="true">
+                <a:solidFill>
+                  <a:srgbClr val="FFFFFF"/>
+                </a:solidFill>
+                <a:latin typeface="Verdana"/>
+              </a:rPr>
+              <a:t>Sao manjary neninao,</a:t>
+            </a:r>
+          </a:p>
+          <a:p>
+            <a:pPr algn="ctr"/>
+            <a:r>
+              <a:rPr lang="en-US" sz="4500" b="true">
+                <a:solidFill>
+                  <a:srgbClr val="FFFFFF"/>
+                </a:solidFill>
+                <a:latin typeface="Verdana"/>
+              </a:rPr>
+              <a:t>Raha tsy mety mahalala</a:t>
             </a:r>
           </a:p>
           <a:p>
@@ -4916,7 +4913,7 @@
                 </a:solidFill>
                 <a:latin typeface="Verdana"/>
               </a:rPr>
-              <a:t>4. </a:t>
+              <a:t>4- </a:t>
             </a:r>
             <a:r>
               <a:rPr lang="en-US" sz="4500" b="true">
@@ -4949,7 +4946,7 @@
                 </a:solidFill>
                 <a:latin typeface="Verdana"/>
               </a:rPr>
-              <a:t>Fa henika ny hasoavanao </a:t>
+              <a:t>Fa henika ny hasoavanao</a:t>
             </a:r>
           </a:p>
           <a:p>
@@ -5275,19 +5272,19 @@
                 </a:solidFill>
                 <a:latin typeface="Verdana"/>
               </a:rPr>
-              <a:t>Soa lehibe no nentinao taty, </a:t>
-            </a:r>
-          </a:p>
-          <a:p>
-            <a:pPr algn="ctr"/>
-            <a:r>
-              <a:rPr lang="en-US" sz="4500" b="true">
-                <a:solidFill>
-                  <a:srgbClr val="FFFFFF"/>
-                </a:solidFill>
-                <a:latin typeface="Verdana"/>
-              </a:rPr>
-              <a:t>Avy izahay, mba hisaotra Anao </a:t>
+              <a:t>Soa lehibe no nentinao taty,</a:t>
+            </a:r>
+          </a:p>
+          <a:p>
+            <a:pPr algn="ctr"/>
+            <a:r>
+              <a:rPr lang="en-US" sz="4500" b="true">
+                <a:solidFill>
+                  <a:srgbClr val="FFFFFF"/>
+                </a:solidFill>
+                <a:latin typeface="Verdana"/>
+              </a:rPr>
+              <a:t>Avy izahay, mba hisaotra Anao</a:t>
             </a:r>
           </a:p>
           <a:p>
@@ -5625,7 +5622,7 @@
                 </a:solidFill>
                 <a:latin typeface="Verdana"/>
               </a:rPr>
-              <a:t>Ny fiderana 'zay entinay, </a:t>
+              <a:t>Ny fiderana 'zay entinay,</a:t>
             </a:r>
           </a:p>
           <a:p>
@@ -5782,7 +5779,7 @@
                 </a:solidFill>
                 <a:latin typeface="Verdana"/>
               </a:rPr>
-              <a:t>3. </a:t>
+              <a:t>3- </a:t>
             </a:r>
             <a:r>
               <a:rPr lang="en-US" sz="4500" b="true">
@@ -6322,7 +6319,7 @@
                 </a:solidFill>
                 <a:latin typeface="Verdana"/>
               </a:rPr>
-              <a:t>Ny fiderana 'zay entinay, </a:t>
+              <a:t>Ny fiderana 'zay entinay,</a:t>
             </a:r>
           </a:p>
           <a:p>
@@ -6479,7 +6476,7 @@
                 </a:solidFill>
                 <a:latin typeface="Verdana"/>
               </a:rPr>
-              <a:t>1. </a:t>
+              <a:t>1- </a:t>
             </a:r>
             <a:r>
               <a:rPr lang="en-US" sz="4500" b="true">
@@ -6524,7 +6521,7 @@
                 </a:solidFill>
                 <a:latin typeface="Verdana"/>
               </a:rPr>
-              <a:t>Tsy azo atao </a:t>
+              <a:t>Tsy azo atao</a:t>
             </a:r>
           </a:p>
           <a:p>
@@ -6585,18 +6582,6 @@
                 <a:latin typeface="Verdana"/>
               </a:rPr>
               <a:t>Herim-po, herin-tsaina koa</a:t>
-            </a:r>
-          </a:p>
-          <a:p>
-            <a:pPr algn="ctr"/>
-            <a:r>
-              <a:rPr lang="en-US" sz="4500" b="true">
-                <a:solidFill>
-                  <a:srgbClr val="FFFFFF"/>
-                </a:solidFill>
-                <a:latin typeface="Verdana"/>
-              </a:rPr>
-              <a:t>F.F 16</a:t>
             </a:r>
           </a:p>
         </p:txBody>

--- a/fafana_2025-07-23.pptx
+++ b/fafana_2025-07-23.pptx
@@ -3135,7 +3135,7 @@
             <a:r>
               <a:rPr lang="en-US" sz="2900" b="true">
                 <a:solidFill>
-                  <a:srgbClr val="FFCC00"/>
+                  <a:srgbClr val="D1AC65"/>
                 </a:solidFill>
                 <a:latin typeface="Verdana"/>
               </a:rPr>
@@ -3177,7 +3177,7 @@
             <a:r>
               <a:rPr lang="en-US" sz="4500" b="true">
                 <a:solidFill>
-                  <a:srgbClr val="FFCC00"/>
+                  <a:srgbClr val="D1AC65"/>
                 </a:solidFill>
                 <a:latin typeface="Verdana"/>
               </a:rPr>
@@ -3313,7 +3313,7 @@
             <a:r>
               <a:rPr lang="en-US" sz="2900" b="true">
                 <a:solidFill>
-                  <a:srgbClr val="FFCC00"/>
+                  <a:srgbClr val="D1AC65"/>
                 </a:solidFill>
                 <a:latin typeface="Verdana"/>
               </a:rPr>
@@ -3355,7 +3355,7 @@
             <a:r>
               <a:rPr lang="en-US" sz="4500" b="true">
                 <a:solidFill>
-                  <a:srgbClr val="FFCC00"/>
+                  <a:srgbClr val="D1AC65"/>
                 </a:solidFill>
                 <a:latin typeface="Verdana"/>
               </a:rPr>
@@ -3491,7 +3491,7 @@
             <a:r>
               <a:rPr lang="en-US" sz="2900" b="true">
                 <a:solidFill>
-                  <a:srgbClr val="FFCC00"/>
+                  <a:srgbClr val="D1AC65"/>
                 </a:solidFill>
                 <a:latin typeface="Verdana"/>
               </a:rPr>
@@ -3533,7 +3533,7 @@
             <a:r>
               <a:rPr lang="en-US" sz="4500" b="true">
                 <a:solidFill>
-                  <a:srgbClr val="FFCC00"/>
+                  <a:srgbClr val="D1AC65"/>
                 </a:solidFill>
                 <a:latin typeface="Verdana"/>
               </a:rPr>
@@ -3669,7 +3669,7 @@
             <a:r>
               <a:rPr lang="en-US" sz="2900" b="true">
                 <a:solidFill>
-                  <a:srgbClr val="FFCC00"/>
+                  <a:srgbClr val="D1AC65"/>
                 </a:solidFill>
                 <a:latin typeface="Verdana"/>
               </a:rPr>
@@ -3826,7 +3826,7 @@
             <a:r>
               <a:rPr lang="en-US" sz="2900" b="true">
                 <a:solidFill>
-                  <a:srgbClr val="FFCC00"/>
+                  <a:srgbClr val="D1AC65"/>
                 </a:solidFill>
                 <a:latin typeface="Verdana"/>
               </a:rPr>
@@ -3868,7 +3868,7 @@
             <a:r>
               <a:rPr lang="en-US" sz="4500" b="true">
                 <a:solidFill>
-                  <a:srgbClr val="FFCC00"/>
+                  <a:srgbClr val="D1AC65"/>
                 </a:solidFill>
                 <a:latin typeface="Verdana"/>
               </a:rPr>
@@ -4004,7 +4004,7 @@
             <a:r>
               <a:rPr lang="en-US" sz="2900" b="true">
                 <a:solidFill>
-                  <a:srgbClr val="FFCC00"/>
+                  <a:srgbClr val="D1AC65"/>
                 </a:solidFill>
                 <a:latin typeface="Verdana"/>
               </a:rPr>
@@ -4173,7 +4173,7 @@
             <a:r>
               <a:rPr lang="en-US" sz="2900" b="true">
                 <a:solidFill>
-                  <a:srgbClr val="FFCC00"/>
+                  <a:srgbClr val="D1AC65"/>
                 </a:solidFill>
                 <a:latin typeface="Verdana"/>
               </a:rPr>
@@ -4215,7 +4215,7 @@
             <a:r>
               <a:rPr lang="en-US" sz="4500" b="true">
                 <a:solidFill>
-                  <a:srgbClr val="FFCC00"/>
+                  <a:srgbClr val="D1AC65"/>
                 </a:solidFill>
                 <a:latin typeface="Verdana"/>
               </a:rPr>
@@ -4351,7 +4351,7 @@
             <a:r>
               <a:rPr lang="en-US" sz="2900" b="true">
                 <a:solidFill>
-                  <a:srgbClr val="FFCC00"/>
+                  <a:srgbClr val="D1AC65"/>
                 </a:solidFill>
                 <a:latin typeface="Verdana"/>
               </a:rPr>
@@ -4520,7 +4520,7 @@
             <a:r>
               <a:rPr lang="en-US" sz="2900" b="true">
                 <a:solidFill>
-                  <a:srgbClr val="FFCC00"/>
+                  <a:srgbClr val="D1AC65"/>
                 </a:solidFill>
                 <a:latin typeface="Verdana"/>
               </a:rPr>
@@ -4562,7 +4562,7 @@
             <a:r>
               <a:rPr lang="en-US" sz="4500" b="true">
                 <a:solidFill>
-                  <a:srgbClr val="FFCC00"/>
+                  <a:srgbClr val="D1AC65"/>
                 </a:solidFill>
                 <a:latin typeface="Verdana"/>
               </a:rPr>
@@ -4698,7 +4698,7 @@
             <a:r>
               <a:rPr lang="en-US" sz="2900" b="true">
                 <a:solidFill>
-                  <a:srgbClr val="FFCC00"/>
+                  <a:srgbClr val="D1AC65"/>
                 </a:solidFill>
                 <a:latin typeface="Verdana"/>
               </a:rPr>
@@ -4867,7 +4867,7 @@
             <a:r>
               <a:rPr lang="en-US" sz="2900" b="true">
                 <a:solidFill>
-                  <a:srgbClr val="FFCC00"/>
+                  <a:srgbClr val="D1AC65"/>
                 </a:solidFill>
                 <a:latin typeface="Verdana"/>
               </a:rPr>
@@ -4909,7 +4909,7 @@
             <a:r>
               <a:rPr lang="en-US" sz="4500" b="true">
                 <a:solidFill>
-                  <a:srgbClr val="FFCC00"/>
+                  <a:srgbClr val="D1AC65"/>
                 </a:solidFill>
                 <a:latin typeface="Verdana"/>
               </a:rPr>
@@ -5045,7 +5045,7 @@
             <a:r>
               <a:rPr lang="en-US" sz="2900" b="true">
                 <a:solidFill>
-                  <a:srgbClr val="FFCC00"/>
+                  <a:srgbClr val="D1AC65"/>
                 </a:solidFill>
                 <a:latin typeface="Verdana"/>
               </a:rPr>
@@ -5214,7 +5214,7 @@
             <a:r>
               <a:rPr lang="en-US" sz="2900" b="true">
                 <a:solidFill>
-                  <a:srgbClr val="FFCC00"/>
+                  <a:srgbClr val="D1AC65"/>
                 </a:solidFill>
                 <a:latin typeface="Verdana"/>
               </a:rPr>
@@ -5383,7 +5383,7 @@
             <a:r>
               <a:rPr lang="en-US" sz="2900" b="true">
                 <a:solidFill>
-                  <a:srgbClr val="FFCC00"/>
+                  <a:srgbClr val="D1AC65"/>
                 </a:solidFill>
                 <a:latin typeface="Verdana"/>
               </a:rPr>
@@ -5552,7 +5552,7 @@
             <a:r>
               <a:rPr lang="en-US" sz="2900" b="true">
                 <a:solidFill>
-                  <a:srgbClr val="FFCC00"/>
+                  <a:srgbClr val="D1AC65"/>
                 </a:solidFill>
                 <a:latin typeface="Verdana"/>
               </a:rPr>
@@ -5733,7 +5733,7 @@
             <a:r>
               <a:rPr lang="en-US" sz="2900" b="true">
                 <a:solidFill>
-                  <a:srgbClr val="FFCC00"/>
+                  <a:srgbClr val="D1AC65"/>
                 </a:solidFill>
                 <a:latin typeface="Verdana"/>
               </a:rPr>
@@ -5775,7 +5775,7 @@
             <a:r>
               <a:rPr lang="en-US" sz="4500" b="true">
                 <a:solidFill>
-                  <a:srgbClr val="FFCC00"/>
+                  <a:srgbClr val="D1AC65"/>
                 </a:solidFill>
                 <a:latin typeface="Verdana"/>
               </a:rPr>
@@ -5911,7 +5911,7 @@
             <a:r>
               <a:rPr lang="en-US" sz="2900" b="true">
                 <a:solidFill>
-                  <a:srgbClr val="FFCC00"/>
+                  <a:srgbClr val="D1AC65"/>
                 </a:solidFill>
                 <a:latin typeface="Verdana"/>
               </a:rPr>
@@ -6080,7 +6080,7 @@
             <a:r>
               <a:rPr lang="en-US" sz="2900" b="true">
                 <a:solidFill>
-                  <a:srgbClr val="FFCC00"/>
+                  <a:srgbClr val="D1AC65"/>
                 </a:solidFill>
                 <a:latin typeface="Verdana"/>
               </a:rPr>
@@ -6249,7 +6249,7 @@
             <a:r>
               <a:rPr lang="en-US" sz="2900" b="true">
                 <a:solidFill>
-                  <a:srgbClr val="FFCC00"/>
+                  <a:srgbClr val="D1AC65"/>
                 </a:solidFill>
                 <a:latin typeface="Verdana"/>
               </a:rPr>
@@ -6430,7 +6430,7 @@
             <a:r>
               <a:rPr lang="en-US" sz="2900" b="true">
                 <a:solidFill>
-                  <a:srgbClr val="FFCC00"/>
+                  <a:srgbClr val="D1AC65"/>
                 </a:solidFill>
                 <a:latin typeface="Verdana"/>
               </a:rPr>
@@ -6472,7 +6472,7 @@
             <a:r>
               <a:rPr lang="en-US" sz="4500" b="true">
                 <a:solidFill>
-                  <a:srgbClr val="FFCC00"/>
+                  <a:srgbClr val="D1AC65"/>
                 </a:solidFill>
                 <a:latin typeface="Verdana"/>
               </a:rPr>

--- a/fafana_2025-07-23.pptx
+++ b/fafana_2025-07-23.pptx
@@ -25,6 +25,17 @@
     <p:sldId id="273" r:id="rId23"/>
     <p:sldId id="274" r:id="rId24"/>
     <p:sldId id="275" r:id="rId25"/>
+    <p:sldId id="276" r:id="rId26"/>
+    <p:sldId id="277" r:id="rId27"/>
+    <p:sldId id="278" r:id="rId28"/>
+    <p:sldId id="279" r:id="rId29"/>
+    <p:sldId id="280" r:id="rId30"/>
+    <p:sldId id="281" r:id="rId31"/>
+    <p:sldId id="282" r:id="rId32"/>
+    <p:sldId id="283" r:id="rId33"/>
+    <p:sldId id="284" r:id="rId34"/>
+    <p:sldId id="285" r:id="rId35"/>
+    <p:sldId id="286" r:id="rId36"/>
   </p:sldIdLst>
   <p:sldSz cx="12192000" cy="6858000"/>
   <p:notesSz cx="6858000" cy="9144000"/>
@@ -3102,135 +3113,6 @@
           </a:prstGeom>
         </p:spPr>
       </p:pic>
-      <p:sp>
-        <p:nvSpPr>
-          <p:cNvPr name="TextBox 3" id="3"/>
-          <p:cNvSpPr txBox="true"/>
-          <p:nvPr/>
-        </p:nvSpPr>
-        <p:spPr>
-          <a:xfrm>
-            <a:off x="4953000" y="-190500"/>
-            <a:ext cx="9525000" cy="762000"/>
-          </a:xfrm>
-          <a:prstGeom prst="rect">
-            <a:avLst/>
-          </a:prstGeom>
-        </p:spPr>
-        <p:txBody>
-          <a:bodyPr anchor="t" rtlCol="false"/>
-          <a:lstStyle/>
-          <a:p>
-            <a:pPr algn="l">
-              <a:defRPr/>
-            </a:pPr>
-            <a:r>
-              <a:rPr lang="fr-MG"/>
-              <a:t/>
-            </a:r>
-            <a:endParaRPr lang="en-US" sz="1100"/>
-          </a:p>
-          <a:p>
-            <a:pPr algn="l"/>
-            <a:r>
-              <a:rPr lang="en-US" sz="2900" b="true">
-                <a:solidFill>
-                  <a:srgbClr val="D1AC65"/>
-                </a:solidFill>
-                <a:latin typeface="Verdana"/>
-              </a:rPr>
-              <a:t>FIHIRANA 171 : 1, 3</a:t>
-            </a:r>
-          </a:p>
-        </p:txBody>
-      </p:sp>
-      <p:sp>
-        <p:nvSpPr>
-          <p:cNvPr name="TextBox 4" id="4"/>
-          <p:cNvSpPr txBox="true"/>
-          <p:nvPr/>
-        </p:nvSpPr>
-        <p:spPr>
-          <a:xfrm>
-            <a:off x="685800" y="508000"/>
-            <a:ext cx="10922000" cy="5080000"/>
-          </a:xfrm>
-          <a:prstGeom prst="rect">
-            <a:avLst/>
-          </a:prstGeom>
-        </p:spPr>
-        <p:txBody>
-          <a:bodyPr anchor="t" rtlCol="false"/>
-          <a:lstStyle/>
-          <a:p>
-            <a:pPr algn="l">
-              <a:defRPr/>
-            </a:pPr>
-            <a:r>
-              <a:rPr lang="fr-MG"/>
-              <a:t/>
-            </a:r>
-            <a:endParaRPr lang="en-US" sz="1100"/>
-          </a:p>
-          <a:p>
-            <a:pPr algn="ctr"/>
-            <a:r>
-              <a:rPr lang="en-US" sz="4500" b="true">
-                <a:solidFill>
-                  <a:srgbClr val="D1AC65"/>
-                </a:solidFill>
-                <a:latin typeface="Verdana"/>
-              </a:rPr>
-              <a:t>1- </a:t>
-            </a:r>
-            <a:r>
-              <a:rPr lang="en-US" sz="4500" b="true">
-                <a:solidFill>
-                  <a:srgbClr val="FFFFFF"/>
-                </a:solidFill>
-                <a:latin typeface="Verdana"/>
-              </a:rPr>
-              <a:t>Jeso Mpanjaka malaza</a:t>
-            </a:r>
-          </a:p>
-          <a:p>
-            <a:pPr algn="ctr"/>
-            <a:r>
-              <a:rPr lang="en-US" sz="4500" b="true">
-                <a:solidFill>
-                  <a:srgbClr val="FFFFFF"/>
-                </a:solidFill>
-                <a:latin typeface="Verdana"/>
-              </a:rPr>
-              <a:t>No Tompo Mpanjakanay;</a:t>
-            </a:r>
-          </a:p>
-          <a:p>
-            <a:pPr algn="ctr"/>
-            <a:r>
-              <a:rPr lang="en-US" sz="4500" b="true">
-                <a:solidFill>
-                  <a:srgbClr val="FFFFFF"/>
-                </a:solidFill>
-                <a:latin typeface="Verdana"/>
-              </a:rPr>
-              <a:t>Mahery sy tsara indrindra,</a:t>
-            </a:r>
-          </a:p>
-          <a:p>
-            <a:pPr algn="ctr"/>
-            <a:r>
-              <a:rPr lang="en-US" sz="4500" b="true">
-                <a:solidFill>
-                  <a:srgbClr val="FFFFFF"/>
-                </a:solidFill>
-                <a:latin typeface="Verdana"/>
-              </a:rPr>
-              <a:t>Ka Izy no aronay</a:t>
-            </a:r>
-          </a:p>
-        </p:txBody>
-      </p:sp>
     </p:spTree>
   </p:cSld>
   <p:clrMapOvr>
@@ -3280,135 +3162,6 @@
           </a:prstGeom>
         </p:spPr>
       </p:pic>
-      <p:sp>
-        <p:nvSpPr>
-          <p:cNvPr name="TextBox 3" id="3"/>
-          <p:cNvSpPr txBox="true"/>
-          <p:nvPr/>
-        </p:nvSpPr>
-        <p:spPr>
-          <a:xfrm>
-            <a:off x="4953000" y="-190500"/>
-            <a:ext cx="9525000" cy="762000"/>
-          </a:xfrm>
-          <a:prstGeom prst="rect">
-            <a:avLst/>
-          </a:prstGeom>
-        </p:spPr>
-        <p:txBody>
-          <a:bodyPr anchor="t" rtlCol="false"/>
-          <a:lstStyle/>
-          <a:p>
-            <a:pPr algn="l">
-              <a:defRPr/>
-            </a:pPr>
-            <a:r>
-              <a:rPr lang="fr-MG"/>
-              <a:t/>
-            </a:r>
-            <a:endParaRPr lang="en-US" sz="1100"/>
-          </a:p>
-          <a:p>
-            <a:pPr algn="l"/>
-            <a:r>
-              <a:rPr lang="en-US" sz="2900" b="true">
-                <a:solidFill>
-                  <a:srgbClr val="D1AC65"/>
-                </a:solidFill>
-                <a:latin typeface="Verdana"/>
-              </a:rPr>
-              <a:t>FIHIRANA FANAMPINY 16 : 1</a:t>
-            </a:r>
-          </a:p>
-        </p:txBody>
-      </p:sp>
-      <p:sp>
-        <p:nvSpPr>
-          <p:cNvPr name="TextBox 4" id="4"/>
-          <p:cNvSpPr txBox="true"/>
-          <p:nvPr/>
-        </p:nvSpPr>
-        <p:spPr>
-          <a:xfrm>
-            <a:off x="685800" y="508000"/>
-            <a:ext cx="10922000" cy="5080000"/>
-          </a:xfrm>
-          <a:prstGeom prst="rect">
-            <a:avLst/>
-          </a:prstGeom>
-        </p:spPr>
-        <p:txBody>
-          <a:bodyPr anchor="t" rtlCol="false"/>
-          <a:lstStyle/>
-          <a:p>
-            <a:pPr algn="l">
-              <a:defRPr/>
-            </a:pPr>
-            <a:r>
-              <a:rPr lang="fr-MG"/>
-              <a:t/>
-            </a:r>
-            <a:endParaRPr lang="en-US" sz="1100"/>
-          </a:p>
-          <a:p>
-            <a:pPr algn="ctr"/>
-            <a:r>
-              <a:rPr lang="en-US" sz="4500" b="true">
-                <a:solidFill>
-                  <a:srgbClr val="D1AC65"/>
-                </a:solidFill>
-                <a:latin typeface="Verdana"/>
-              </a:rPr>
-              <a:t>Fiv:</a:t>
-            </a:r>
-            <a:r>
-              <a:rPr lang="en-US" sz="4500" b="true">
-                <a:solidFill>
-                  <a:srgbClr val="FFFFFF"/>
-                </a:solidFill>
-                <a:latin typeface="Verdana"/>
-              </a:rPr>
-              <a:t> Na onena ny fonao</a:t>
-            </a:r>
-          </a:p>
-          <a:p>
-            <a:pPr algn="ctr"/>
-            <a:r>
-              <a:rPr lang="en-US" sz="4500" b="true">
-                <a:solidFill>
-                  <a:srgbClr val="FFFFFF"/>
-                </a:solidFill>
-                <a:latin typeface="Verdana"/>
-              </a:rPr>
-              <a:t>Na tomany ny maso</a:t>
-            </a:r>
-          </a:p>
-          <a:p>
-            <a:pPr algn="ctr"/>
-            <a:r>
-              <a:rPr lang="en-US" sz="4500" b="true">
-                <a:solidFill>
-                  <a:srgbClr val="FFFFFF"/>
-                </a:solidFill>
-                <a:latin typeface="Verdana"/>
-              </a:rPr>
-              <a:t>Tsy izany no ilaina</a:t>
-            </a:r>
-          </a:p>
-          <a:p>
-            <a:pPr algn="ctr"/>
-            <a:r>
-              <a:rPr lang="en-US" sz="4500" b="true">
-                <a:solidFill>
-                  <a:srgbClr val="FFFFFF"/>
-                </a:solidFill>
-                <a:latin typeface="Verdana"/>
-              </a:rPr>
-              <a:t>Fa fifankatiavana</a:t>
-            </a:r>
-          </a:p>
-        </p:txBody>
-      </p:sp>
     </p:spTree>
   </p:cSld>
   <p:clrMapOvr>
@@ -3458,135 +3211,6 @@
           </a:prstGeom>
         </p:spPr>
       </p:pic>
-      <p:sp>
-        <p:nvSpPr>
-          <p:cNvPr name="TextBox 3" id="3"/>
-          <p:cNvSpPr txBox="true"/>
-          <p:nvPr/>
-        </p:nvSpPr>
-        <p:spPr>
-          <a:xfrm>
-            <a:off x="4953000" y="-190500"/>
-            <a:ext cx="9525000" cy="762000"/>
-          </a:xfrm>
-          <a:prstGeom prst="rect">
-            <a:avLst/>
-          </a:prstGeom>
-        </p:spPr>
-        <p:txBody>
-          <a:bodyPr anchor="t" rtlCol="false"/>
-          <a:lstStyle/>
-          <a:p>
-            <a:pPr algn="l">
-              <a:defRPr/>
-            </a:pPr>
-            <a:r>
-              <a:rPr lang="fr-MG"/>
-              <a:t/>
-            </a:r>
-            <a:endParaRPr lang="en-US" sz="1100"/>
-          </a:p>
-          <a:p>
-            <a:pPr algn="l"/>
-            <a:r>
-              <a:rPr lang="en-US" sz="2900" b="true">
-                <a:solidFill>
-                  <a:srgbClr val="D1AC65"/>
-                </a:solidFill>
-                <a:latin typeface="Verdana"/>
-              </a:rPr>
-              <a:t>FIHIRANA 417 : 2</a:t>
-            </a:r>
-          </a:p>
-        </p:txBody>
-      </p:sp>
-      <p:sp>
-        <p:nvSpPr>
-          <p:cNvPr name="TextBox 4" id="4"/>
-          <p:cNvSpPr txBox="true"/>
-          <p:nvPr/>
-        </p:nvSpPr>
-        <p:spPr>
-          <a:xfrm>
-            <a:off x="685800" y="508000"/>
-            <a:ext cx="10922000" cy="5080000"/>
-          </a:xfrm>
-          <a:prstGeom prst="rect">
-            <a:avLst/>
-          </a:prstGeom>
-        </p:spPr>
-        <p:txBody>
-          <a:bodyPr anchor="t" rtlCol="false"/>
-          <a:lstStyle/>
-          <a:p>
-            <a:pPr algn="l">
-              <a:defRPr/>
-            </a:pPr>
-            <a:r>
-              <a:rPr lang="fr-MG"/>
-              <a:t/>
-            </a:r>
-            <a:endParaRPr lang="en-US" sz="1100"/>
-          </a:p>
-          <a:p>
-            <a:pPr algn="ctr"/>
-            <a:r>
-              <a:rPr lang="en-US" sz="4500" b="true">
-                <a:solidFill>
-                  <a:srgbClr val="D1AC65"/>
-                </a:solidFill>
-                <a:latin typeface="Verdana"/>
-              </a:rPr>
-              <a:t>2- </a:t>
-            </a:r>
-            <a:r>
-              <a:rPr lang="en-US" sz="4500" b="true">
-                <a:solidFill>
-                  <a:srgbClr val="FFFFFF"/>
-                </a:solidFill>
-                <a:latin typeface="Verdana"/>
-              </a:rPr>
-              <a:t>Maniry hanana fiadanam-po,</a:t>
-            </a:r>
-          </a:p>
-          <a:p>
-            <a:pPr algn="ctr"/>
-            <a:r>
-              <a:rPr lang="en-US" sz="4500" b="true">
-                <a:solidFill>
-                  <a:srgbClr val="FFFFFF"/>
-                </a:solidFill>
-                <a:latin typeface="Verdana"/>
-              </a:rPr>
-              <a:t>Izao dia te-hody aho,</a:t>
-            </a:r>
-          </a:p>
-          <a:p>
-            <a:pPr algn="ctr"/>
-            <a:r>
-              <a:rPr lang="en-US" sz="4500" b="true">
-                <a:solidFill>
-                  <a:srgbClr val="FFFFFF"/>
-                </a:solidFill>
-                <a:latin typeface="Verdana"/>
-              </a:rPr>
-              <a:t>Sy mba hivesatra ny zioganao,</a:t>
-            </a:r>
-          </a:p>
-          <a:p>
-            <a:pPr algn="ctr"/>
-            <a:r>
-              <a:rPr lang="en-US" sz="4500" b="true">
-                <a:solidFill>
-                  <a:srgbClr val="FFFFFF"/>
-                </a:solidFill>
-                <a:latin typeface="Verdana"/>
-              </a:rPr>
-              <a:t>Izao dia te-hody aho,</a:t>
-            </a:r>
-          </a:p>
-        </p:txBody>
-      </p:sp>
     </p:spTree>
   </p:cSld>
   <p:clrMapOvr>
@@ -3659,7 +3283,7 @@
               <a:defRPr/>
             </a:pPr>
             <a:r>
-              <a:rPr lang="fr-MG"/>
+              <a:rPr lang="fr-FR"/>
               <a:t/>
             </a:r>
             <a:endParaRPr lang="en-US" sz="1100"/>
@@ -3673,7 +3297,7 @@
                 </a:solidFill>
                 <a:latin typeface="Verdana"/>
               </a:rPr>
-              <a:t>FIHIRANA 417 : 2</a:t>
+              <a:t>FIHIRANA 171 : 1, 3</a:t>
             </a:r>
           </a:p>
         </p:txBody>
@@ -3701,7 +3325,7 @@
               <a:defRPr/>
             </a:pPr>
             <a:r>
-              <a:rPr lang="fr-MG"/>
+              <a:rPr lang="fr-FR"/>
               <a:t/>
             </a:r>
             <a:endParaRPr lang="en-US" sz="1100"/>
@@ -3711,35 +3335,56 @@
             <a:r>
               <a:rPr lang="en-US" sz="4500" b="true">
                 <a:solidFill>
-                  <a:srgbClr val="FFFFFF"/>
-                </a:solidFill>
-                <a:latin typeface="Verdana"/>
-              </a:rPr>
-              <a:t>:,: Inty tamy aho,</a:t>
-            </a:r>
-          </a:p>
-          <a:p>
-            <a:pPr algn="ctr"/>
-            <a:r>
-              <a:rPr lang="en-US" sz="4500" b="true">
-                <a:solidFill>
-                  <a:srgbClr val="FFFFFF"/>
-                </a:solidFill>
-                <a:latin typeface="Verdana"/>
-              </a:rPr>
-              <a:t>Raiko malala ô,</a:t>
-            </a:r>
-          </a:p>
-          <a:p>
-            <a:pPr algn="ctr"/>
-            <a:r>
-              <a:rPr lang="en-US" sz="4500" b="true">
-                <a:solidFill>
-                  <a:srgbClr val="FFFFFF"/>
-                </a:solidFill>
-                <a:latin typeface="Verdana"/>
-              </a:rPr>
-              <a:t>Raiso ny tanako. :,:</a:t>
+                  <a:srgbClr val="D1AC65"/>
+                </a:solidFill>
+                <a:latin typeface="Verdana"/>
+              </a:rPr>
+              <a:t>1- </a:t>
+            </a:r>
+            <a:r>
+              <a:rPr lang="en-US" sz="4500" b="true">
+                <a:solidFill>
+                  <a:srgbClr val="FFFFFF"/>
+                </a:solidFill>
+                <a:latin typeface="Verdana"/>
+              </a:rPr>
+              <a:t>Jeso Mpanjaka malaza</a:t>
+            </a:r>
+          </a:p>
+          <a:p>
+            <a:pPr algn="ctr"/>
+            <a:r>
+              <a:rPr lang="en-US" sz="4500" b="true">
+                <a:solidFill>
+                  <a:srgbClr val="FFFFFF"/>
+                </a:solidFill>
+                <a:latin typeface="Verdana"/>
+              </a:rPr>
+              <a:t>No Tompo Mpanjakanay;</a:t>
+            </a:r>
+          </a:p>
+          <a:p>
+            <a:pPr algn="ctr"/>
+            <a:r>
+              <a:rPr lang="en-US" sz="4500" b="true">
+                <a:solidFill>
+                  <a:srgbClr val="FFFFFF"/>
+                </a:solidFill>
+                <a:latin typeface="Verdana"/>
+              </a:rPr>
+              <a:t>Mahery sy tsara indrindra,</a:t>
+            </a:r>
+          </a:p>
+          <a:p>
+            <a:pPr algn="ctr"/>
+            <a:r>
+              <a:rPr lang="en-US" sz="4500" b="true">
+                <a:solidFill>
+                  <a:srgbClr val="FFFFFF"/>
+                </a:solidFill>
+                <a:latin typeface="Verdana"/>
+              </a:rPr>
+              <a:t>Ka Izy no aronay</a:t>
             </a:r>
           </a:p>
         </p:txBody>
@@ -3816,7 +3461,7 @@
               <a:defRPr/>
             </a:pPr>
             <a:r>
-              <a:rPr lang="fr-MG"/>
+              <a:rPr lang="fr-FR"/>
               <a:t/>
             </a:r>
             <a:endParaRPr lang="en-US" sz="1100"/>
@@ -3830,7 +3475,7 @@
                 </a:solidFill>
                 <a:latin typeface="Verdana"/>
               </a:rPr>
-              <a:t>FIHIRANA 487 : 1</a:t>
+              <a:t>FIHIRANA 171 : 1, 3</a:t>
             </a:r>
           </a:p>
         </p:txBody>
@@ -3858,7 +3503,7 @@
               <a:defRPr/>
             </a:pPr>
             <a:r>
-              <a:rPr lang="fr-MG"/>
+              <a:rPr lang="fr-FR"/>
               <a:t/>
             </a:r>
             <a:endParaRPr lang="en-US" sz="1100"/>
@@ -3868,56 +3513,47 @@
             <a:r>
               <a:rPr lang="en-US" sz="4500" b="true">
                 <a:solidFill>
-                  <a:srgbClr val="D1AC65"/>
-                </a:solidFill>
-                <a:latin typeface="Verdana"/>
-              </a:rPr>
-              <a:t>1- </a:t>
-            </a:r>
-            <a:r>
-              <a:rPr lang="en-US" sz="4500" b="true">
-                <a:solidFill>
-                  <a:srgbClr val="FFFFFF"/>
-                </a:solidFill>
-                <a:latin typeface="Verdana"/>
-              </a:rPr>
-              <a:t>Fanavaozan'izay mahagaga tokoa</a:t>
-            </a:r>
-          </a:p>
-          <a:p>
-            <a:pPr algn="ctr"/>
-            <a:r>
-              <a:rPr lang="en-US" sz="4500" b="true">
-                <a:solidFill>
-                  <a:srgbClr val="FFFFFF"/>
-                </a:solidFill>
-                <a:latin typeface="Verdana"/>
-              </a:rPr>
-              <a:t>Nomen'i Jeso ahy re,</a:t>
-            </a:r>
-          </a:p>
-          <a:p>
-            <a:pPr algn="ctr"/>
-            <a:r>
-              <a:rPr lang="en-US" sz="4500" b="true">
-                <a:solidFill>
-                  <a:srgbClr val="FFFFFF"/>
-                </a:solidFill>
-                <a:latin typeface="Verdana"/>
-              </a:rPr>
-              <a:t>Fahazavan'ny fanahy izay mahafa-po</a:t>
-            </a:r>
-          </a:p>
-          <a:p>
-            <a:pPr algn="ctr"/>
-            <a:r>
-              <a:rPr lang="en-US" sz="4500" b="true">
-                <a:solidFill>
-                  <a:srgbClr val="FFFFFF"/>
-                </a:solidFill>
-                <a:latin typeface="Verdana"/>
-              </a:rPr>
-              <a:t>Nomen'i Jeso ahy re,</a:t>
+                  <a:srgbClr val="FFFFFF"/>
+                </a:solidFill>
+                <a:latin typeface="Verdana"/>
+              </a:rPr>
+              <a:t>Mendrika hankalazaina</a:t>
+            </a:r>
+          </a:p>
+          <a:p>
+            <a:pPr algn="ctr"/>
+            <a:r>
+              <a:rPr lang="en-US" sz="4500" b="true">
+                <a:solidFill>
+                  <a:srgbClr val="FFFFFF"/>
+                </a:solidFill>
+                <a:latin typeface="Verdana"/>
+              </a:rPr>
+              <a:t>Noho ny heriny;</a:t>
+            </a:r>
+          </a:p>
+          <a:p>
+            <a:pPr algn="ctr"/>
+            <a:r>
+              <a:rPr lang="en-US" sz="4500" b="true">
+                <a:solidFill>
+                  <a:srgbClr val="FFFFFF"/>
+                </a:solidFill>
+                <a:latin typeface="Verdana"/>
+              </a:rPr>
+              <a:t>Eran-tany sy lanitra koa</a:t>
+            </a:r>
+          </a:p>
+          <a:p>
+            <a:pPr algn="ctr"/>
+            <a:r>
+              <a:rPr lang="en-US" sz="4500" b="true">
+                <a:solidFill>
+                  <a:srgbClr val="FFFFFF"/>
+                </a:solidFill>
+                <a:latin typeface="Verdana"/>
+              </a:rPr>
+              <a:t>Ny zo aman-dazany.</a:t>
             </a:r>
           </a:p>
         </p:txBody>
@@ -3994,7 +3630,7 @@
               <a:defRPr/>
             </a:pPr>
             <a:r>
-              <a:rPr lang="fr-MG"/>
+              <a:rPr lang="fr-FR"/>
               <a:t/>
             </a:r>
             <a:endParaRPr lang="en-US" sz="1100"/>
@@ -4008,7 +3644,7 @@
                 </a:solidFill>
                 <a:latin typeface="Verdana"/>
               </a:rPr>
-              <a:t>FIHIRANA 487 : 1</a:t>
+              <a:t>FIHIRANA 171 : 1, 3</a:t>
             </a:r>
           </a:p>
         </p:txBody>
@@ -4036,7 +3672,7 @@
               <a:defRPr/>
             </a:pPr>
             <a:r>
-              <a:rPr lang="fr-MG"/>
+              <a:rPr lang="fr-FR"/>
               <a:t/>
             </a:r>
             <a:endParaRPr lang="en-US" sz="1100"/>
@@ -4050,43 +3686,43 @@
                 </a:solidFill>
                 <a:latin typeface="Verdana"/>
               </a:rPr>
-              <a:t>Hatramin'izao dia endrey</a:t>
-            </a:r>
-          </a:p>
-          <a:p>
-            <a:pPr algn="ctr"/>
-            <a:r>
-              <a:rPr lang="en-US" sz="4500" b="true">
-                <a:solidFill>
-                  <a:srgbClr val="FFFFFF"/>
-                </a:solidFill>
-                <a:latin typeface="Verdana"/>
-              </a:rPr>
-              <a:t>Hatramin'izao dia endrey</a:t>
-            </a:r>
-          </a:p>
-          <a:p>
-            <a:pPr algn="ctr"/>
-            <a:r>
-              <a:rPr lang="en-US" sz="4500" b="true">
-                <a:solidFill>
-                  <a:srgbClr val="FFFFFF"/>
-                </a:solidFill>
-                <a:latin typeface="Verdana"/>
-              </a:rPr>
-              <a:t>Ny fitepon'ny foko izay ravo tokoa</a:t>
-            </a:r>
-          </a:p>
-          <a:p>
-            <a:pPr algn="ctr"/>
-            <a:r>
-              <a:rPr lang="en-US" sz="4500" b="true">
-                <a:solidFill>
-                  <a:srgbClr val="FFFFFF"/>
-                </a:solidFill>
-                <a:latin typeface="Verdana"/>
-              </a:rPr>
-              <a:t>Onenan'ny Tompo Jeso.</a:t>
+              <a:t>Ry Tompo Mpanjaka mahery ô!</a:t>
+            </a:r>
+          </a:p>
+          <a:p>
+            <a:pPr algn="ctr"/>
+            <a:r>
+              <a:rPr lang="en-US" sz="4500" b="true">
+                <a:solidFill>
+                  <a:srgbClr val="FFFFFF"/>
+                </a:solidFill>
+                <a:latin typeface="Verdana"/>
+              </a:rPr>
+              <a:t>Mihainoa ! Mihainoa !</a:t>
+            </a:r>
+          </a:p>
+          <a:p>
+            <a:pPr algn="ctr"/>
+            <a:r>
+              <a:rPr lang="en-US" sz="4500" b="true">
+                <a:solidFill>
+                  <a:srgbClr val="FFFFFF"/>
+                </a:solidFill>
+                <a:latin typeface="Verdana"/>
+              </a:rPr>
+              <a:t>Avy manaiky tokoa 'zahay</a:t>
+            </a:r>
+          </a:p>
+          <a:p>
+            <a:pPr algn="ctr"/>
+            <a:r>
+              <a:rPr lang="en-US" sz="4500" b="true">
+                <a:solidFill>
+                  <a:srgbClr val="FFFFFF"/>
+                </a:solidFill>
+                <a:latin typeface="Verdana"/>
+              </a:rPr>
+              <a:t>Fa Tompon'ny hery rehetra Hianao,</a:t>
             </a:r>
           </a:p>
         </p:txBody>
@@ -4163,7 +3799,7 @@
               <a:defRPr/>
             </a:pPr>
             <a:r>
-              <a:rPr lang="fr-MG"/>
+              <a:rPr lang="fr-FR"/>
               <a:t/>
             </a:r>
             <a:endParaRPr lang="en-US" sz="1100"/>
@@ -4177,7 +3813,7 @@
                 </a:solidFill>
                 <a:latin typeface="Verdana"/>
               </a:rPr>
-              <a:t>FIHIRANA 205 : 2</a:t>
+              <a:t>FIHIRANA 171 : 1, 3</a:t>
             </a:r>
           </a:p>
         </p:txBody>
@@ -4205,7 +3841,7 @@
               <a:defRPr/>
             </a:pPr>
             <a:r>
-              <a:rPr lang="fr-MG"/>
+              <a:rPr lang="fr-FR"/>
               <a:t/>
             </a:r>
             <a:endParaRPr lang="en-US" sz="1100"/>
@@ -4215,56 +3851,59 @@
             <a:r>
               <a:rPr lang="en-US" sz="4500" b="true">
                 <a:solidFill>
-                  <a:srgbClr val="D1AC65"/>
-                </a:solidFill>
-                <a:latin typeface="Verdana"/>
-              </a:rPr>
-              <a:t>2- </a:t>
-            </a:r>
-            <a:r>
-              <a:rPr lang="en-US" sz="4500" b="true">
-                <a:solidFill>
-                  <a:srgbClr val="FFFFFF"/>
-                </a:solidFill>
-                <a:latin typeface="Verdana"/>
-              </a:rPr>
-              <a:t>Ny tenin'ny Baiboly</a:t>
-            </a:r>
-          </a:p>
-          <a:p>
-            <a:pPr algn="ctr"/>
-            <a:r>
-              <a:rPr lang="en-US" sz="4500" b="true">
-                <a:solidFill>
-                  <a:srgbClr val="FFFFFF"/>
-                </a:solidFill>
-                <a:latin typeface="Verdana"/>
-              </a:rPr>
-              <a:t>No sabatra entinay</a:t>
-            </a:r>
-          </a:p>
-          <a:p>
-            <a:pPr algn="ctr"/>
-            <a:r>
-              <a:rPr lang="en-US" sz="4500" b="true">
-                <a:solidFill>
-                  <a:srgbClr val="FFFFFF"/>
-                </a:solidFill>
-                <a:latin typeface="Verdana"/>
-              </a:rPr>
-              <a:t>Handresy ny devoly,</a:t>
-            </a:r>
-          </a:p>
-          <a:p>
-            <a:pPr algn="ctr"/>
-            <a:r>
-              <a:rPr lang="en-US" sz="4500" b="true">
-                <a:solidFill>
-                  <a:srgbClr val="FFFFFF"/>
-                </a:solidFill>
-                <a:latin typeface="Verdana"/>
-              </a:rPr>
-              <a:t>'Lay fahavalonay;</a:t>
+                  <a:srgbClr val="FFFFFF"/>
+                </a:solidFill>
+                <a:latin typeface="Verdana"/>
+              </a:rPr>
+              <a:t>Tsy misy mihitsy ny toa Anao</a:t>
+            </a:r>
+          </a:p>
+          <a:p>
+            <a:pPr algn="ctr"/>
+            <a:r>
+              <a:rPr lang="en-US" sz="4500" b="true">
+                <a:solidFill>
+                  <a:srgbClr val="FFFFFF"/>
+                </a:solidFill>
+                <a:latin typeface="Verdana"/>
+              </a:rPr>
+              <a:t>Tsy tratry ny saina ny herinao</a:t>
+            </a:r>
+          </a:p>
+          <a:p>
+            <a:pPr algn="ctr"/>
+            <a:r>
+              <a:rPr lang="en-US" sz="4500" b="true">
+                <a:solidFill>
+                  <a:srgbClr val="FFFFFF"/>
+                </a:solidFill>
+                <a:latin typeface="Verdana"/>
+              </a:rPr>
+              <a:t>Ny fiderana 'zay entinay,</a:t>
+            </a:r>
+          </a:p>
+          <a:p>
+            <a:pPr algn="ctr"/>
+            <a:r>
+              <a:rPr lang="en-US" sz="4500" b="true">
+                <a:solidFill>
+                  <a:srgbClr val="FFFFFF"/>
+                </a:solidFill>
+                <a:latin typeface="Verdana"/>
+              </a:rPr>
+              <a:t>Raiso re ! Raiso re!</a:t>
+            </a:r>
+          </a:p>
+          <a:p>
+            <a:pPr algn="ctr"/>
+            <a:r>
+              <a:rPr lang="en-US" sz="4500" b="true">
+                <a:solidFill>
+                  <a:srgbClr val="FFFFFF"/>
+                </a:solidFill>
+                <a:latin typeface="Verdana"/>
+              </a:rPr>
+              <a:t>Ny haja atolotra Anao ety, Raiso izao !</a:t>
             </a:r>
           </a:p>
         </p:txBody>
@@ -4341,7 +3980,7 @@
               <a:defRPr/>
             </a:pPr>
             <a:r>
-              <a:rPr lang="fr-MG"/>
+              <a:rPr lang="fr-FR"/>
               <a:t/>
             </a:r>
             <a:endParaRPr lang="en-US" sz="1100"/>
@@ -4355,7 +3994,7 @@
                 </a:solidFill>
                 <a:latin typeface="Verdana"/>
               </a:rPr>
-              <a:t>FIHIRANA 205 : 2</a:t>
+              <a:t>FIHIRANA 171 : 1, 3</a:t>
             </a:r>
           </a:p>
         </p:txBody>
@@ -4383,7 +4022,7 @@
               <a:defRPr/>
             </a:pPr>
             <a:r>
-              <a:rPr lang="fr-MG"/>
+              <a:rPr lang="fr-FR"/>
               <a:t/>
             </a:r>
             <a:endParaRPr lang="en-US" sz="1100"/>
@@ -4393,47 +4032,56 @@
             <a:r>
               <a:rPr lang="en-US" sz="4500" b="true">
                 <a:solidFill>
-                  <a:srgbClr val="FFFFFF"/>
-                </a:solidFill>
-                <a:latin typeface="Verdana"/>
-              </a:rPr>
-              <a:t>Raha misy mampahory,</a:t>
-            </a:r>
-          </a:p>
-          <a:p>
-            <a:pPr algn="ctr"/>
-            <a:r>
-              <a:rPr lang="en-US" sz="4500" b="true">
-                <a:solidFill>
-                  <a:srgbClr val="FFFFFF"/>
-                </a:solidFill>
-                <a:latin typeface="Verdana"/>
-              </a:rPr>
-              <a:t>Ka osa izahay</a:t>
-            </a:r>
-          </a:p>
-          <a:p>
-            <a:pPr algn="ctr"/>
-            <a:r>
-              <a:rPr lang="en-US" sz="4500" b="true">
-                <a:solidFill>
-                  <a:srgbClr val="FFFFFF"/>
-                </a:solidFill>
-                <a:latin typeface="Verdana"/>
-              </a:rPr>
-              <a:t>Ny teninao mahery</a:t>
-            </a:r>
-          </a:p>
-          <a:p>
-            <a:pPr algn="ctr"/>
-            <a:r>
-              <a:rPr lang="en-US" sz="4500" b="true">
-                <a:solidFill>
-                  <a:srgbClr val="FFFFFF"/>
-                </a:solidFill>
-                <a:latin typeface="Verdana"/>
-              </a:rPr>
-              <a:t>Manjary tanjakay</a:t>
+                  <a:srgbClr val="D1AC65"/>
+                </a:solidFill>
+                <a:latin typeface="Verdana"/>
+              </a:rPr>
+              <a:t>3- </a:t>
+            </a:r>
+            <a:r>
+              <a:rPr lang="en-US" sz="4500" b="true">
+                <a:solidFill>
+                  <a:srgbClr val="FFFFFF"/>
+                </a:solidFill>
+                <a:latin typeface="Verdana"/>
+              </a:rPr>
+              <a:t>Tompo, Mpanjaka Tsitoha,</a:t>
+            </a:r>
+          </a:p>
+          <a:p>
+            <a:pPr algn="ctr"/>
+            <a:r>
+              <a:rPr lang="en-US" sz="4500" b="true">
+                <a:solidFill>
+                  <a:srgbClr val="FFFFFF"/>
+                </a:solidFill>
+                <a:latin typeface="Verdana"/>
+              </a:rPr>
+              <a:t>Kanefa be indrafo;</a:t>
+            </a:r>
+          </a:p>
+          <a:p>
+            <a:pPr algn="ctr"/>
+            <a:r>
+              <a:rPr lang="en-US" sz="4500" b="true">
+                <a:solidFill>
+                  <a:srgbClr val="FFFFFF"/>
+                </a:solidFill>
+                <a:latin typeface="Verdana"/>
+              </a:rPr>
+              <a:t>Deraina eram-po erantsaina,</a:t>
+            </a:r>
+          </a:p>
+          <a:p>
+            <a:pPr algn="ctr"/>
+            <a:r>
+              <a:rPr lang="en-US" sz="4500" b="true">
+                <a:solidFill>
+                  <a:srgbClr val="FFFFFF"/>
+                </a:solidFill>
+                <a:latin typeface="Verdana"/>
+              </a:rPr>
+              <a:t>Deraina mandrakizay ;</a:t>
             </a:r>
           </a:p>
         </p:txBody>
@@ -4510,7 +4158,7 @@
               <a:defRPr/>
             </a:pPr>
             <a:r>
-              <a:rPr lang="fr-MG"/>
+              <a:rPr lang="fr-FR"/>
               <a:t/>
             </a:r>
             <a:endParaRPr lang="en-US" sz="1100"/>
@@ -4524,7 +4172,7 @@
                 </a:solidFill>
                 <a:latin typeface="Verdana"/>
               </a:rPr>
-              <a:t>FIHIRANA 354 : 3</a:t>
+              <a:t>FIHIRANA 171 : 1, 3</a:t>
             </a:r>
           </a:p>
         </p:txBody>
@@ -4552,7 +4200,7 @@
               <a:defRPr/>
             </a:pPr>
             <a:r>
-              <a:rPr lang="fr-MG"/>
+              <a:rPr lang="fr-FR"/>
               <a:t/>
             </a:r>
             <a:endParaRPr lang="en-US" sz="1100"/>
@@ -4562,56 +4210,47 @@
             <a:r>
               <a:rPr lang="en-US" sz="4500" b="true">
                 <a:solidFill>
-                  <a:srgbClr val="D1AC65"/>
-                </a:solidFill>
-                <a:latin typeface="Verdana"/>
-              </a:rPr>
-              <a:t>3- </a:t>
-            </a:r>
-            <a:r>
-              <a:rPr lang="en-US" sz="4500" b="true">
-                <a:solidFill>
-                  <a:srgbClr val="FFFFFF"/>
-                </a:solidFill>
-                <a:latin typeface="Verdana"/>
-              </a:rPr>
-              <a:t>Sao ity no toriteny</a:t>
-            </a:r>
-          </a:p>
-          <a:p>
-            <a:pPr algn="ctr"/>
-            <a:r>
-              <a:rPr lang="en-US" sz="4500" b="true">
-                <a:solidFill>
-                  <a:srgbClr val="FFFFFF"/>
-                </a:solidFill>
-                <a:latin typeface="Verdana"/>
-              </a:rPr>
-              <a:t>Fara-fanasana anao;</a:t>
-            </a:r>
-          </a:p>
-          <a:p>
-            <a:pPr algn="ctr"/>
-            <a:r>
-              <a:rPr lang="en-US" sz="4500" b="true">
-                <a:solidFill>
-                  <a:srgbClr val="FFFFFF"/>
-                </a:solidFill>
-                <a:latin typeface="Verdana"/>
-              </a:rPr>
-              <a:t>Sao anio no fotoana</a:t>
-            </a:r>
-          </a:p>
-          <a:p>
-            <a:pPr algn="ctr"/>
-            <a:r>
-              <a:rPr lang="en-US" sz="4500" b="true">
-                <a:solidFill>
-                  <a:srgbClr val="FFFFFF"/>
-                </a:solidFill>
-                <a:latin typeface="Verdana"/>
-              </a:rPr>
-              <a:t>Fara-ahavelomanao;</a:t>
+                  <a:srgbClr val="FFFFFF"/>
+                </a:solidFill>
+                <a:latin typeface="Verdana"/>
+              </a:rPr>
+              <a:t>He ! Ny mpanompo voavonjy</a:t>
+            </a:r>
+          </a:p>
+          <a:p>
+            <a:pPr algn="ctr"/>
+            <a:r>
+              <a:rPr lang="en-US" sz="4500" b="true">
+                <a:solidFill>
+                  <a:srgbClr val="FFFFFF"/>
+                </a:solidFill>
+                <a:latin typeface="Verdana"/>
+              </a:rPr>
+              <a:t>Samy mihoby hoe :</a:t>
+            </a:r>
+          </a:p>
+          <a:p>
+            <a:pPr algn="ctr"/>
+            <a:r>
+              <a:rPr lang="en-US" sz="4500" b="true">
+                <a:solidFill>
+                  <a:srgbClr val="FFFFFF"/>
+                </a:solidFill>
+                <a:latin typeface="Verdana"/>
+              </a:rPr>
+              <a:t>"Haleloia ho amin’ny Avo,</a:t>
+            </a:r>
+          </a:p>
+          <a:p>
+            <a:pPr algn="ctr"/>
+            <a:r>
+              <a:rPr lang="en-US" sz="4500" b="true">
+                <a:solidFill>
+                  <a:srgbClr val="FFFFFF"/>
+                </a:solidFill>
+                <a:latin typeface="Verdana"/>
+              </a:rPr>
+              <a:t>Fa Jeso no Tomponay "</a:t>
             </a:r>
           </a:p>
         </p:txBody>
@@ -4688,7 +4327,7 @@
               <a:defRPr/>
             </a:pPr>
             <a:r>
-              <a:rPr lang="fr-MG"/>
+              <a:rPr lang="fr-FR"/>
               <a:t/>
             </a:r>
             <a:endParaRPr lang="en-US" sz="1100"/>
@@ -4702,7 +4341,7 @@
                 </a:solidFill>
                 <a:latin typeface="Verdana"/>
               </a:rPr>
-              <a:t>FIHIRANA 354 : 3</a:t>
+              <a:t>FIHIRANA 171 : 1, 3</a:t>
             </a:r>
           </a:p>
         </p:txBody>
@@ -4730,7 +4369,7 @@
               <a:defRPr/>
             </a:pPr>
             <a:r>
-              <a:rPr lang="fr-MG"/>
+              <a:rPr lang="fr-FR"/>
               <a:t/>
             </a:r>
             <a:endParaRPr lang="en-US" sz="1100"/>
@@ -4744,43 +4383,43 @@
                 </a:solidFill>
                 <a:latin typeface="Verdana"/>
               </a:rPr>
-              <a:t>Ka aza mba misalasala,</a:t>
-            </a:r>
-          </a:p>
-          <a:p>
-            <a:pPr algn="ctr"/>
-            <a:r>
-              <a:rPr lang="en-US" sz="4500" b="true">
-                <a:solidFill>
-                  <a:srgbClr val="FFFFFF"/>
-                </a:solidFill>
-                <a:latin typeface="Verdana"/>
-              </a:rPr>
-              <a:t>Sao manjary neninao,</a:t>
-            </a:r>
-          </a:p>
-          <a:p>
-            <a:pPr algn="ctr"/>
-            <a:r>
-              <a:rPr lang="en-US" sz="4500" b="true">
-                <a:solidFill>
-                  <a:srgbClr val="FFFFFF"/>
-                </a:solidFill>
-                <a:latin typeface="Verdana"/>
-              </a:rPr>
-              <a:t>Raha tsy mety mahalala</a:t>
-            </a:r>
-          </a:p>
-          <a:p>
-            <a:pPr algn="ctr"/>
-            <a:r>
-              <a:rPr lang="en-US" sz="4500" b="true">
-                <a:solidFill>
-                  <a:srgbClr val="FFFFFF"/>
-                </a:solidFill>
-                <a:latin typeface="Verdana"/>
-              </a:rPr>
-              <a:t>Izao fotoana mety izao.</a:t>
+              <a:t>Ry Tompo Mpanjaka mahery ô!</a:t>
+            </a:r>
+          </a:p>
+          <a:p>
+            <a:pPr algn="ctr"/>
+            <a:r>
+              <a:rPr lang="en-US" sz="4500" b="true">
+                <a:solidFill>
+                  <a:srgbClr val="FFFFFF"/>
+                </a:solidFill>
+                <a:latin typeface="Verdana"/>
+              </a:rPr>
+              <a:t>Mihainoa ! Mihainoa !</a:t>
+            </a:r>
+          </a:p>
+          <a:p>
+            <a:pPr algn="ctr"/>
+            <a:r>
+              <a:rPr lang="en-US" sz="4500" b="true">
+                <a:solidFill>
+                  <a:srgbClr val="FFFFFF"/>
+                </a:solidFill>
+                <a:latin typeface="Verdana"/>
+              </a:rPr>
+              <a:t>Avy manaiky tokoa 'zahay</a:t>
+            </a:r>
+          </a:p>
+          <a:p>
+            <a:pPr algn="ctr"/>
+            <a:r>
+              <a:rPr lang="en-US" sz="4500" b="true">
+                <a:solidFill>
+                  <a:srgbClr val="FFFFFF"/>
+                </a:solidFill>
+                <a:latin typeface="Verdana"/>
+              </a:rPr>
+              <a:t>Fa Tompon'ny hery rehetra Hianao,</a:t>
             </a:r>
           </a:p>
         </p:txBody>
@@ -4857,7 +4496,7 @@
               <a:defRPr/>
             </a:pPr>
             <a:r>
-              <a:rPr lang="fr-MG"/>
+              <a:rPr lang="fr-FR"/>
               <a:t/>
             </a:r>
             <a:endParaRPr lang="en-US" sz="1100"/>
@@ -4871,7 +4510,7 @@
                 </a:solidFill>
                 <a:latin typeface="Verdana"/>
               </a:rPr>
-              <a:t>FIHIRANA 547 : 4</a:t>
+              <a:t>FIHIRANA 171 : 1, 3</a:t>
             </a:r>
           </a:p>
         </p:txBody>
@@ -4899,7 +4538,7 @@
               <a:defRPr/>
             </a:pPr>
             <a:r>
-              <a:rPr lang="fr-MG"/>
+              <a:rPr lang="fr-FR"/>
               <a:t/>
             </a:r>
             <a:endParaRPr lang="en-US" sz="1100"/>
@@ -4909,56 +4548,59 @@
             <a:r>
               <a:rPr lang="en-US" sz="4500" b="true">
                 <a:solidFill>
-                  <a:srgbClr val="D1AC65"/>
-                </a:solidFill>
-                <a:latin typeface="Verdana"/>
-              </a:rPr>
-              <a:t>4- </a:t>
-            </a:r>
-            <a:r>
-              <a:rPr lang="en-US" sz="4500" b="true">
-                <a:solidFill>
-                  <a:srgbClr val="FFFFFF"/>
-                </a:solidFill>
-                <a:latin typeface="Verdana"/>
-              </a:rPr>
-              <a:t>Ry Jeso Tompo tia anay ô!</a:t>
-            </a:r>
-          </a:p>
-          <a:p>
-            <a:pPr algn="ctr"/>
-            <a:r>
-              <a:rPr lang="en-US" sz="4500" b="true">
-                <a:solidFill>
-                  <a:srgbClr val="FFFFFF"/>
-                </a:solidFill>
-                <a:latin typeface="Verdana"/>
-              </a:rPr>
-              <a:t>Misaotra Anao izahay izao</a:t>
-            </a:r>
-          </a:p>
-          <a:p>
-            <a:pPr algn="ctr"/>
-            <a:r>
-              <a:rPr lang="en-US" sz="4500" b="true">
-                <a:solidFill>
-                  <a:srgbClr val="FFFFFF"/>
-                </a:solidFill>
-                <a:latin typeface="Verdana"/>
-              </a:rPr>
-              <a:t>Fa henika ny hasoavanao</a:t>
-            </a:r>
-          </a:p>
-          <a:p>
-            <a:pPr algn="ctr"/>
-            <a:r>
-              <a:rPr lang="en-US" sz="4500" b="true">
-                <a:solidFill>
-                  <a:srgbClr val="FFFFFF"/>
-                </a:solidFill>
-                <a:latin typeface="Verdana"/>
-              </a:rPr>
-              <a:t>Izao tontolo izao.</a:t>
+                  <a:srgbClr val="FFFFFF"/>
+                </a:solidFill>
+                <a:latin typeface="Verdana"/>
+              </a:rPr>
+              <a:t>Tsy misy mihitsy ny toa Anao,</a:t>
+            </a:r>
+          </a:p>
+          <a:p>
+            <a:pPr algn="ctr"/>
+            <a:r>
+              <a:rPr lang="en-US" sz="4500" b="true">
+                <a:solidFill>
+                  <a:srgbClr val="FFFFFF"/>
+                </a:solidFill>
+                <a:latin typeface="Verdana"/>
+              </a:rPr>
+              <a:t>Tsy tratry ny saina ny herinao</a:t>
+            </a:r>
+          </a:p>
+          <a:p>
+            <a:pPr algn="ctr"/>
+            <a:r>
+              <a:rPr lang="en-US" sz="4500" b="true">
+                <a:solidFill>
+                  <a:srgbClr val="FFFFFF"/>
+                </a:solidFill>
+                <a:latin typeface="Verdana"/>
+              </a:rPr>
+              <a:t>Ny fiderana 'zay entinay,</a:t>
+            </a:r>
+          </a:p>
+          <a:p>
+            <a:pPr algn="ctr"/>
+            <a:r>
+              <a:rPr lang="en-US" sz="4500" b="true">
+                <a:solidFill>
+                  <a:srgbClr val="FFFFFF"/>
+                </a:solidFill>
+                <a:latin typeface="Verdana"/>
+              </a:rPr>
+              <a:t>Raiso re ! Raiso re!</a:t>
+            </a:r>
+          </a:p>
+          <a:p>
+            <a:pPr algn="ctr"/>
+            <a:r>
+              <a:rPr lang="en-US" sz="4500" b="true">
+                <a:solidFill>
+                  <a:srgbClr val="FFFFFF"/>
+                </a:solidFill>
+                <a:latin typeface="Verdana"/>
+              </a:rPr>
+              <a:t>Ny haja atolotra Anao ety, Raiso izao !</a:t>
             </a:r>
           </a:p>
         </p:txBody>
@@ -5012,126 +4654,6 @@
           </a:prstGeom>
         </p:spPr>
       </p:pic>
-      <p:sp>
-        <p:nvSpPr>
-          <p:cNvPr name="TextBox 3" id="3"/>
-          <p:cNvSpPr txBox="true"/>
-          <p:nvPr/>
-        </p:nvSpPr>
-        <p:spPr>
-          <a:xfrm>
-            <a:off x="4953000" y="-190500"/>
-            <a:ext cx="9525000" cy="762000"/>
-          </a:xfrm>
-          <a:prstGeom prst="rect">
-            <a:avLst/>
-          </a:prstGeom>
-        </p:spPr>
-        <p:txBody>
-          <a:bodyPr anchor="t" rtlCol="false"/>
-          <a:lstStyle/>
-          <a:p>
-            <a:pPr algn="l">
-              <a:defRPr/>
-            </a:pPr>
-            <a:r>
-              <a:rPr lang="fr-MG"/>
-              <a:t/>
-            </a:r>
-            <a:endParaRPr lang="en-US" sz="1100"/>
-          </a:p>
-          <a:p>
-            <a:pPr algn="l"/>
-            <a:r>
-              <a:rPr lang="en-US" sz="2900" b="true">
-                <a:solidFill>
-                  <a:srgbClr val="D1AC65"/>
-                </a:solidFill>
-                <a:latin typeface="Verdana"/>
-              </a:rPr>
-              <a:t>FIHIRANA 171 : 1, 3</a:t>
-            </a:r>
-          </a:p>
-        </p:txBody>
-      </p:sp>
-      <p:sp>
-        <p:nvSpPr>
-          <p:cNvPr name="TextBox 4" id="4"/>
-          <p:cNvSpPr txBox="true"/>
-          <p:nvPr/>
-        </p:nvSpPr>
-        <p:spPr>
-          <a:xfrm>
-            <a:off x="685800" y="508000"/>
-            <a:ext cx="10922000" cy="5080000"/>
-          </a:xfrm>
-          <a:prstGeom prst="rect">
-            <a:avLst/>
-          </a:prstGeom>
-        </p:spPr>
-        <p:txBody>
-          <a:bodyPr anchor="t" rtlCol="false"/>
-          <a:lstStyle/>
-          <a:p>
-            <a:pPr algn="l">
-              <a:defRPr/>
-            </a:pPr>
-            <a:r>
-              <a:rPr lang="fr-MG"/>
-              <a:t/>
-            </a:r>
-            <a:endParaRPr lang="en-US" sz="1100"/>
-          </a:p>
-          <a:p>
-            <a:pPr algn="ctr"/>
-            <a:r>
-              <a:rPr lang="en-US" sz="4500" b="true">
-                <a:solidFill>
-                  <a:srgbClr val="FFFFFF"/>
-                </a:solidFill>
-                <a:latin typeface="Verdana"/>
-              </a:rPr>
-              <a:t>Mendrika hankalazaina</a:t>
-            </a:r>
-          </a:p>
-          <a:p>
-            <a:pPr algn="ctr"/>
-            <a:r>
-              <a:rPr lang="en-US" sz="4500" b="true">
-                <a:solidFill>
-                  <a:srgbClr val="FFFFFF"/>
-                </a:solidFill>
-                <a:latin typeface="Verdana"/>
-              </a:rPr>
-              <a:t>Noho ny heriny;</a:t>
-            </a:r>
-          </a:p>
-          <a:p>
-            <a:pPr algn="ctr"/>
-            <a:r>
-              <a:rPr lang="en-US" sz="4500" b="true">
-                <a:solidFill>
-                  <a:srgbClr val="FFFFFF"/>
-                </a:solidFill>
-                <a:latin typeface="Verdana"/>
-              </a:rPr>
-              <a:t>Eran-tany sy lanitra koa</a:t>
-            </a:r>
-          </a:p>
-          <a:p>
-            <a:pPr algn="ctr"/>
-            <a:r>
-              <a:rPr lang="en-US" sz="4500" b="true">
-                <a:solidFill>
-                  <a:srgbClr val="FFFFFF"/>
-                </a:solidFill>
-                <a:latin typeface="Verdana"/>
-              </a:rPr>
-              <a:t>Ny zo aman-dazany.</a:t>
-            </a:r>
-          </a:p>
-        </p:txBody>
-      </p:sp>
     </p:spTree>
   </p:cSld>
   <p:clrMapOvr>
@@ -5204,7 +4726,7 @@
               <a:defRPr/>
             </a:pPr>
             <a:r>
-              <a:rPr lang="fr-MG"/>
+              <a:rPr lang="fr-FR"/>
               <a:t/>
             </a:r>
             <a:endParaRPr lang="en-US" sz="1100"/>
@@ -5218,7 +4740,7 @@
                 </a:solidFill>
                 <a:latin typeface="Verdana"/>
               </a:rPr>
-              <a:t>FIHIRANA 547 : 4</a:t>
+              <a:t>FIHIRANA FANAMPINY 16 : 1</a:t>
             </a:r>
           </a:p>
         </p:txBody>
@@ -5246,7 +4768,7 @@
               <a:defRPr/>
             </a:pPr>
             <a:r>
-              <a:rPr lang="fr-MG"/>
+              <a:rPr lang="fr-FR"/>
               <a:t/>
             </a:r>
             <a:endParaRPr lang="en-US" sz="1100"/>
@@ -5256,47 +4778,1670 @@
             <a:r>
               <a:rPr lang="en-US" sz="4500" b="true">
                 <a:solidFill>
-                  <a:srgbClr val="FFFFFF"/>
-                </a:solidFill>
-                <a:latin typeface="Verdana"/>
-              </a:rPr>
-              <a:t>Eny, Jeso! Zoky be fitia,</a:t>
-            </a:r>
-          </a:p>
-          <a:p>
-            <a:pPr algn="ctr"/>
-            <a:r>
-              <a:rPr lang="en-US" sz="4500" b="true">
-                <a:solidFill>
-                  <a:srgbClr val="FFFFFF"/>
-                </a:solidFill>
-                <a:latin typeface="Verdana"/>
-              </a:rPr>
-              <a:t>Soa lehibe no nentinao taty,</a:t>
-            </a:r>
-          </a:p>
-          <a:p>
-            <a:pPr algn="ctr"/>
-            <a:r>
-              <a:rPr lang="en-US" sz="4500" b="true">
-                <a:solidFill>
-                  <a:srgbClr val="FFFFFF"/>
-                </a:solidFill>
-                <a:latin typeface="Verdana"/>
-              </a:rPr>
-              <a:t>Avy izahay, mba hisaotra Anao</a:t>
-            </a:r>
-          </a:p>
-          <a:p>
-            <a:pPr algn="ctr"/>
-            <a:r>
-              <a:rPr lang="en-US" sz="4500" b="true">
-                <a:solidFill>
-                  <a:srgbClr val="FFFFFF"/>
-                </a:solidFill>
-                <a:latin typeface="Verdana"/>
-              </a:rPr>
-              <a:t>Noho ny fitiavanao.</a:t>
+                  <a:srgbClr val="D1AC65"/>
+                </a:solidFill>
+                <a:latin typeface="Verdana"/>
+              </a:rPr>
+              <a:t>1- </a:t>
+            </a:r>
+            <a:r>
+              <a:rPr lang="en-US" sz="4500" b="true">
+                <a:solidFill>
+                  <a:srgbClr val="FFFFFF"/>
+                </a:solidFill>
+                <a:latin typeface="Verdana"/>
+              </a:rPr>
+              <a:t>Tsy vitam-po onena</a:t>
+            </a:r>
+          </a:p>
+          <a:p>
+            <a:pPr algn="ctr"/>
+            <a:r>
+              <a:rPr lang="en-US" sz="4500" b="true">
+                <a:solidFill>
+                  <a:srgbClr val="FFFFFF"/>
+                </a:solidFill>
+                <a:latin typeface="Verdana"/>
+              </a:rPr>
+              <a:t>Tsy vitan-dranomaso</a:t>
+            </a:r>
+          </a:p>
+          <a:p>
+            <a:pPr algn="ctr"/>
+            <a:r>
+              <a:rPr lang="en-US" sz="4500" b="true">
+                <a:solidFill>
+                  <a:srgbClr val="FFFFFF"/>
+                </a:solidFill>
+                <a:latin typeface="Verdana"/>
+              </a:rPr>
+              <a:t>Ny Asam-pamonjena</a:t>
+            </a:r>
+          </a:p>
+          <a:p>
+            <a:pPr algn="ctr"/>
+            <a:r>
+              <a:rPr lang="en-US" sz="4500" b="true">
+                <a:solidFill>
+                  <a:srgbClr val="FFFFFF"/>
+                </a:solidFill>
+                <a:latin typeface="Verdana"/>
+              </a:rPr>
+              <a:t>Tsy azo atao</a:t>
+            </a:r>
+          </a:p>
+          <a:p>
+            <a:pPr algn="ctr"/>
+            <a:r>
+              <a:rPr lang="en-US" sz="4500" b="true">
+                <a:solidFill>
+                  <a:srgbClr val="FFFFFF"/>
+                </a:solidFill>
+                <a:latin typeface="Verdana"/>
+              </a:rPr>
+              <a:t>Mifampiandry andraso</a:t>
+            </a:r>
+          </a:p>
+          <a:p>
+            <a:pPr algn="ctr"/>
+            <a:r>
+              <a:rPr lang="en-US" sz="4500" b="true">
+                <a:solidFill>
+                  <a:srgbClr val="FFFFFF"/>
+                </a:solidFill>
+                <a:latin typeface="Verdana"/>
+              </a:rPr>
+              <a:t>Tsy azo ifanerena</a:t>
+            </a:r>
+          </a:p>
+          <a:p>
+            <a:pPr algn="ctr"/>
+            <a:r>
+              <a:rPr lang="en-US" sz="4500" b="true">
+                <a:solidFill>
+                  <a:srgbClr val="FFFFFF"/>
+                </a:solidFill>
+                <a:latin typeface="Verdana"/>
+              </a:rPr>
+              <a:t>Mila fandavan-tena</a:t>
+            </a:r>
+          </a:p>
+          <a:p>
+            <a:pPr algn="ctr"/>
+            <a:r>
+              <a:rPr lang="en-US" sz="4500" b="true">
+                <a:solidFill>
+                  <a:srgbClr val="FFFFFF"/>
+                </a:solidFill>
+                <a:latin typeface="Verdana"/>
+              </a:rPr>
+              <a:t>Sy hery tsy mba maty</a:t>
+            </a:r>
+          </a:p>
+          <a:p>
+            <a:pPr algn="ctr"/>
+            <a:r>
+              <a:rPr lang="en-US" sz="4500" b="true">
+                <a:solidFill>
+                  <a:srgbClr val="FFFFFF"/>
+                </a:solidFill>
+                <a:latin typeface="Verdana"/>
+              </a:rPr>
+              <a:t>Herim-po, herin-tsaina koa</a:t>
+            </a:r>
+          </a:p>
+        </p:txBody>
+      </p:sp>
+    </p:spTree>
+  </p:cSld>
+  <p:clrMapOvr>
+    <a:masterClrMapping/>
+  </p:clrMapOvr>
+</p:sld>
+</file>
+
+<file path=ppt/slides/slide21.xml><?xml version="1.0" encoding="utf-8"?>
+<p:sld xmlns:p="http://schemas.openxmlformats.org/presentationml/2006/main" xmlns:a="http://schemas.openxmlformats.org/drawingml/2006/main" xmlns:r="http://schemas.openxmlformats.org/officeDocument/2006/relationships">
+  <p:cSld>
+    <p:spTree>
+      <p:nvGrpSpPr>
+        <p:cNvPr id="1" name=""/>
+        <p:cNvGrpSpPr/>
+        <p:nvPr/>
+      </p:nvGrpSpPr>
+      <p:grpSpPr>
+        <a:xfrm>
+          <a:off x="0" y="0"/>
+          <a:ext cx="0" cy="0"/>
+          <a:chOff x="0" y="0"/>
+          <a:chExt cx="0" cy="0"/>
+        </a:xfrm>
+      </p:grpSpPr>
+      <p:pic>
+        <p:nvPicPr>
+          <p:cNvPr name="Picture 2" id="2"/>
+          <p:cNvPicPr>
+            <a:picLocks noChangeAspect="true"/>
+          </p:cNvPicPr>
+          <p:nvPr/>
+        </p:nvPicPr>
+        <p:blipFill>
+          <a:blip r:embed="rId2"/>
+          <a:stretch>
+            <a:fillRect/>
+          </a:stretch>
+        </p:blipFill>
+        <p:spPr>
+          <a:xfrm>
+            <a:off x="0" y="0"/>
+            <a:ext cx="12192000" cy="6858000"/>
+          </a:xfrm>
+          <a:prstGeom prst="rect">
+            <a:avLst/>
+          </a:prstGeom>
+        </p:spPr>
+      </p:pic>
+      <p:sp>
+        <p:nvSpPr>
+          <p:cNvPr name="TextBox 3" id="3"/>
+          <p:cNvSpPr txBox="true"/>
+          <p:nvPr/>
+        </p:nvSpPr>
+        <p:spPr>
+          <a:xfrm>
+            <a:off x="4953000" y="-190500"/>
+            <a:ext cx="9525000" cy="762000"/>
+          </a:xfrm>
+          <a:prstGeom prst="rect">
+            <a:avLst/>
+          </a:prstGeom>
+        </p:spPr>
+        <p:txBody>
+          <a:bodyPr anchor="t" rtlCol="false"/>
+          <a:lstStyle/>
+          <a:p>
+            <a:pPr algn="l">
+              <a:defRPr/>
+            </a:pPr>
+            <a:r>
+              <a:rPr lang="fr-FR"/>
+              <a:t/>
+            </a:r>
+            <a:endParaRPr lang="en-US" sz="1100"/>
+          </a:p>
+          <a:p>
+            <a:pPr algn="l"/>
+            <a:r>
+              <a:rPr lang="en-US" sz="2900" b="true">
+                <a:solidFill>
+                  <a:srgbClr val="D1AC65"/>
+                </a:solidFill>
+                <a:latin typeface="Verdana"/>
+              </a:rPr>
+              <a:t>FIHIRANA FANAMPINY 16 : 1</a:t>
+            </a:r>
+          </a:p>
+        </p:txBody>
+      </p:sp>
+      <p:sp>
+        <p:nvSpPr>
+          <p:cNvPr name="TextBox 4" id="4"/>
+          <p:cNvSpPr txBox="true"/>
+          <p:nvPr/>
+        </p:nvSpPr>
+        <p:spPr>
+          <a:xfrm>
+            <a:off x="685800" y="508000"/>
+            <a:ext cx="10922000" cy="5080000"/>
+          </a:xfrm>
+          <a:prstGeom prst="rect">
+            <a:avLst/>
+          </a:prstGeom>
+        </p:spPr>
+        <p:txBody>
+          <a:bodyPr anchor="t" rtlCol="false"/>
+          <a:lstStyle/>
+          <a:p>
+            <a:pPr algn="l">
+              <a:defRPr/>
+            </a:pPr>
+            <a:r>
+              <a:rPr lang="fr-FR"/>
+              <a:t/>
+            </a:r>
+            <a:endParaRPr lang="en-US" sz="1100"/>
+          </a:p>
+          <a:p>
+            <a:pPr algn="ctr"/>
+            <a:r>
+              <a:rPr lang="en-US" sz="4500" b="true">
+                <a:solidFill>
+                  <a:srgbClr val="D1AC65"/>
+                </a:solidFill>
+                <a:latin typeface="Verdana"/>
+              </a:rPr>
+              <a:t>Fiv:</a:t>
+            </a:r>
+            <a:r>
+              <a:rPr lang="en-US" sz="4500" b="true">
+                <a:solidFill>
+                  <a:srgbClr val="FFFFFF"/>
+                </a:solidFill>
+                <a:latin typeface="Verdana"/>
+              </a:rPr>
+              <a:t> Na onena ny fonao</a:t>
+            </a:r>
+          </a:p>
+          <a:p>
+            <a:pPr algn="ctr"/>
+            <a:r>
+              <a:rPr lang="en-US" sz="4500" b="true">
+                <a:solidFill>
+                  <a:srgbClr val="FFFFFF"/>
+                </a:solidFill>
+                <a:latin typeface="Verdana"/>
+              </a:rPr>
+              <a:t>Na tomany ny maso</a:t>
+            </a:r>
+          </a:p>
+          <a:p>
+            <a:pPr algn="ctr"/>
+            <a:r>
+              <a:rPr lang="en-US" sz="4500" b="true">
+                <a:solidFill>
+                  <a:srgbClr val="FFFFFF"/>
+                </a:solidFill>
+                <a:latin typeface="Verdana"/>
+              </a:rPr>
+              <a:t>Tsy izany no ilaina</a:t>
+            </a:r>
+          </a:p>
+          <a:p>
+            <a:pPr algn="ctr"/>
+            <a:r>
+              <a:rPr lang="en-US" sz="4500" b="true">
+                <a:solidFill>
+                  <a:srgbClr val="FFFFFF"/>
+                </a:solidFill>
+                <a:latin typeface="Verdana"/>
+              </a:rPr>
+              <a:t>Fa fifankatiavana</a:t>
+            </a:r>
+          </a:p>
+        </p:txBody>
+      </p:sp>
+    </p:spTree>
+  </p:cSld>
+  <p:clrMapOvr>
+    <a:masterClrMapping/>
+  </p:clrMapOvr>
+</p:sld>
+</file>
+
+<file path=ppt/slides/slide22.xml><?xml version="1.0" encoding="utf-8"?>
+<p:sld xmlns:p="http://schemas.openxmlformats.org/presentationml/2006/main" xmlns:a="http://schemas.openxmlformats.org/drawingml/2006/main" xmlns:r="http://schemas.openxmlformats.org/officeDocument/2006/relationships">
+  <p:cSld>
+    <p:spTree>
+      <p:nvGrpSpPr>
+        <p:cNvPr id="1" name=""/>
+        <p:cNvGrpSpPr/>
+        <p:nvPr/>
+      </p:nvGrpSpPr>
+      <p:grpSpPr>
+        <a:xfrm>
+          <a:off x="0" y="0"/>
+          <a:ext cx="0" cy="0"/>
+          <a:chOff x="0" y="0"/>
+          <a:chExt cx="0" cy="0"/>
+        </a:xfrm>
+      </p:grpSpPr>
+      <p:pic>
+        <p:nvPicPr>
+          <p:cNvPr name="Picture 2" id="2"/>
+          <p:cNvPicPr>
+            <a:picLocks noChangeAspect="true"/>
+          </p:cNvPicPr>
+          <p:nvPr/>
+        </p:nvPicPr>
+        <p:blipFill>
+          <a:blip r:embed="rId2"/>
+          <a:stretch>
+            <a:fillRect/>
+          </a:stretch>
+        </p:blipFill>
+        <p:spPr>
+          <a:xfrm>
+            <a:off x="0" y="0"/>
+            <a:ext cx="12192000" cy="6858000"/>
+          </a:xfrm>
+          <a:prstGeom prst="rect">
+            <a:avLst/>
+          </a:prstGeom>
+        </p:spPr>
+      </p:pic>
+      <p:sp>
+        <p:nvSpPr>
+          <p:cNvPr name="TextBox 3" id="3"/>
+          <p:cNvSpPr txBox="true"/>
+          <p:nvPr/>
+        </p:nvSpPr>
+        <p:spPr>
+          <a:xfrm>
+            <a:off x="4953000" y="-190500"/>
+            <a:ext cx="9525000" cy="762000"/>
+          </a:xfrm>
+          <a:prstGeom prst="rect">
+            <a:avLst/>
+          </a:prstGeom>
+        </p:spPr>
+        <p:txBody>
+          <a:bodyPr anchor="t" rtlCol="false"/>
+          <a:lstStyle/>
+          <a:p>
+            <a:pPr algn="l">
+              <a:defRPr/>
+            </a:pPr>
+            <a:r>
+              <a:rPr lang="fr-FR"/>
+              <a:t/>
+            </a:r>
+            <a:endParaRPr lang="en-US" sz="1100"/>
+          </a:p>
+          <a:p>
+            <a:pPr algn="l"/>
+            <a:r>
+              <a:rPr lang="en-US" sz="2900" b="true">
+                <a:solidFill>
+                  <a:srgbClr val="D1AC65"/>
+                </a:solidFill>
+                <a:latin typeface="Verdana"/>
+              </a:rPr>
+              <a:t>FIHIRANA 417 : 2</a:t>
+            </a:r>
+          </a:p>
+        </p:txBody>
+      </p:sp>
+      <p:sp>
+        <p:nvSpPr>
+          <p:cNvPr name="TextBox 4" id="4"/>
+          <p:cNvSpPr txBox="true"/>
+          <p:nvPr/>
+        </p:nvSpPr>
+        <p:spPr>
+          <a:xfrm>
+            <a:off x="685800" y="508000"/>
+            <a:ext cx="10922000" cy="5080000"/>
+          </a:xfrm>
+          <a:prstGeom prst="rect">
+            <a:avLst/>
+          </a:prstGeom>
+        </p:spPr>
+        <p:txBody>
+          <a:bodyPr anchor="t" rtlCol="false"/>
+          <a:lstStyle/>
+          <a:p>
+            <a:pPr algn="l">
+              <a:defRPr/>
+            </a:pPr>
+            <a:r>
+              <a:rPr lang="fr-FR"/>
+              <a:t/>
+            </a:r>
+            <a:endParaRPr lang="en-US" sz="1100"/>
+          </a:p>
+          <a:p>
+            <a:pPr algn="ctr"/>
+            <a:r>
+              <a:rPr lang="en-US" sz="4500" b="true">
+                <a:solidFill>
+                  <a:srgbClr val="D1AC65"/>
+                </a:solidFill>
+                <a:latin typeface="Verdana"/>
+              </a:rPr>
+              <a:t>2- </a:t>
+            </a:r>
+            <a:r>
+              <a:rPr lang="en-US" sz="4500" b="true">
+                <a:solidFill>
+                  <a:srgbClr val="FFFFFF"/>
+                </a:solidFill>
+                <a:latin typeface="Verdana"/>
+              </a:rPr>
+              <a:t>Maniry hanana fiadanam-po,</a:t>
+            </a:r>
+          </a:p>
+          <a:p>
+            <a:pPr algn="ctr"/>
+            <a:r>
+              <a:rPr lang="en-US" sz="4500" b="true">
+                <a:solidFill>
+                  <a:srgbClr val="FFFFFF"/>
+                </a:solidFill>
+                <a:latin typeface="Verdana"/>
+              </a:rPr>
+              <a:t>Izao dia te-hody aho,</a:t>
+            </a:r>
+          </a:p>
+          <a:p>
+            <a:pPr algn="ctr"/>
+            <a:r>
+              <a:rPr lang="en-US" sz="4500" b="true">
+                <a:solidFill>
+                  <a:srgbClr val="FFFFFF"/>
+                </a:solidFill>
+                <a:latin typeface="Verdana"/>
+              </a:rPr>
+              <a:t>Sy mba hivesatra ny zioganao,</a:t>
+            </a:r>
+          </a:p>
+          <a:p>
+            <a:pPr algn="ctr"/>
+            <a:r>
+              <a:rPr lang="en-US" sz="4500" b="true">
+                <a:solidFill>
+                  <a:srgbClr val="FFFFFF"/>
+                </a:solidFill>
+                <a:latin typeface="Verdana"/>
+              </a:rPr>
+              <a:t>Izao dia te-hody aho,</a:t>
+            </a:r>
+          </a:p>
+        </p:txBody>
+      </p:sp>
+    </p:spTree>
+  </p:cSld>
+  <p:clrMapOvr>
+    <a:masterClrMapping/>
+  </p:clrMapOvr>
+</p:sld>
+</file>
+
+<file path=ppt/slides/slide23.xml><?xml version="1.0" encoding="utf-8"?>
+<p:sld xmlns:p="http://schemas.openxmlformats.org/presentationml/2006/main" xmlns:a="http://schemas.openxmlformats.org/drawingml/2006/main" xmlns:r="http://schemas.openxmlformats.org/officeDocument/2006/relationships">
+  <p:cSld>
+    <p:spTree>
+      <p:nvGrpSpPr>
+        <p:cNvPr id="1" name=""/>
+        <p:cNvGrpSpPr/>
+        <p:nvPr/>
+      </p:nvGrpSpPr>
+      <p:grpSpPr>
+        <a:xfrm>
+          <a:off x="0" y="0"/>
+          <a:ext cx="0" cy="0"/>
+          <a:chOff x="0" y="0"/>
+          <a:chExt cx="0" cy="0"/>
+        </a:xfrm>
+      </p:grpSpPr>
+      <p:pic>
+        <p:nvPicPr>
+          <p:cNvPr name="Picture 2" id="2"/>
+          <p:cNvPicPr>
+            <a:picLocks noChangeAspect="true"/>
+          </p:cNvPicPr>
+          <p:nvPr/>
+        </p:nvPicPr>
+        <p:blipFill>
+          <a:blip r:embed="rId2"/>
+          <a:stretch>
+            <a:fillRect/>
+          </a:stretch>
+        </p:blipFill>
+        <p:spPr>
+          <a:xfrm>
+            <a:off x="0" y="0"/>
+            <a:ext cx="12192000" cy="6858000"/>
+          </a:xfrm>
+          <a:prstGeom prst="rect">
+            <a:avLst/>
+          </a:prstGeom>
+        </p:spPr>
+      </p:pic>
+      <p:sp>
+        <p:nvSpPr>
+          <p:cNvPr name="TextBox 3" id="3"/>
+          <p:cNvSpPr txBox="true"/>
+          <p:nvPr/>
+        </p:nvSpPr>
+        <p:spPr>
+          <a:xfrm>
+            <a:off x="4953000" y="-190500"/>
+            <a:ext cx="9525000" cy="762000"/>
+          </a:xfrm>
+          <a:prstGeom prst="rect">
+            <a:avLst/>
+          </a:prstGeom>
+        </p:spPr>
+        <p:txBody>
+          <a:bodyPr anchor="t" rtlCol="false"/>
+          <a:lstStyle/>
+          <a:p>
+            <a:pPr algn="l">
+              <a:defRPr/>
+            </a:pPr>
+            <a:r>
+              <a:rPr lang="fr-FR"/>
+              <a:t/>
+            </a:r>
+            <a:endParaRPr lang="en-US" sz="1100"/>
+          </a:p>
+          <a:p>
+            <a:pPr algn="l"/>
+            <a:r>
+              <a:rPr lang="en-US" sz="2900" b="true">
+                <a:solidFill>
+                  <a:srgbClr val="D1AC65"/>
+                </a:solidFill>
+                <a:latin typeface="Verdana"/>
+              </a:rPr>
+              <a:t>FIHIRANA 417 : 2</a:t>
+            </a:r>
+          </a:p>
+        </p:txBody>
+      </p:sp>
+      <p:sp>
+        <p:nvSpPr>
+          <p:cNvPr name="TextBox 4" id="4"/>
+          <p:cNvSpPr txBox="true"/>
+          <p:nvPr/>
+        </p:nvSpPr>
+        <p:spPr>
+          <a:xfrm>
+            <a:off x="685800" y="508000"/>
+            <a:ext cx="10922000" cy="5080000"/>
+          </a:xfrm>
+          <a:prstGeom prst="rect">
+            <a:avLst/>
+          </a:prstGeom>
+        </p:spPr>
+        <p:txBody>
+          <a:bodyPr anchor="t" rtlCol="false"/>
+          <a:lstStyle/>
+          <a:p>
+            <a:pPr algn="l">
+              <a:defRPr/>
+            </a:pPr>
+            <a:r>
+              <a:rPr lang="fr-FR"/>
+              <a:t/>
+            </a:r>
+            <a:endParaRPr lang="en-US" sz="1100"/>
+          </a:p>
+          <a:p>
+            <a:pPr algn="ctr"/>
+            <a:r>
+              <a:rPr lang="en-US" sz="4500" b="true">
+                <a:solidFill>
+                  <a:srgbClr val="FFFFFF"/>
+                </a:solidFill>
+                <a:latin typeface="Verdana"/>
+              </a:rPr>
+              <a:t>:,: Inty tamy aho,</a:t>
+            </a:r>
+          </a:p>
+          <a:p>
+            <a:pPr algn="ctr"/>
+            <a:r>
+              <a:rPr lang="en-US" sz="4500" b="true">
+                <a:solidFill>
+                  <a:srgbClr val="FFFFFF"/>
+                </a:solidFill>
+                <a:latin typeface="Verdana"/>
+              </a:rPr>
+              <a:t>Raiko malala ô,</a:t>
+            </a:r>
+          </a:p>
+          <a:p>
+            <a:pPr algn="ctr"/>
+            <a:r>
+              <a:rPr lang="en-US" sz="4500" b="true">
+                <a:solidFill>
+                  <a:srgbClr val="FFFFFF"/>
+                </a:solidFill>
+                <a:latin typeface="Verdana"/>
+              </a:rPr>
+              <a:t>Raiso ny tanako. :,:</a:t>
+            </a:r>
+          </a:p>
+        </p:txBody>
+      </p:sp>
+    </p:spTree>
+  </p:cSld>
+  <p:clrMapOvr>
+    <a:masterClrMapping/>
+  </p:clrMapOvr>
+</p:sld>
+</file>
+
+<file path=ppt/slides/slide24.xml><?xml version="1.0" encoding="utf-8"?>
+<p:sld xmlns:p="http://schemas.openxmlformats.org/presentationml/2006/main" xmlns:a="http://schemas.openxmlformats.org/drawingml/2006/main" xmlns:r="http://schemas.openxmlformats.org/officeDocument/2006/relationships">
+  <p:cSld>
+    <p:spTree>
+      <p:nvGrpSpPr>
+        <p:cNvPr id="1" name=""/>
+        <p:cNvGrpSpPr/>
+        <p:nvPr/>
+      </p:nvGrpSpPr>
+      <p:grpSpPr>
+        <a:xfrm>
+          <a:off x="0" y="0"/>
+          <a:ext cx="0" cy="0"/>
+          <a:chOff x="0" y="0"/>
+          <a:chExt cx="0" cy="0"/>
+        </a:xfrm>
+      </p:grpSpPr>
+      <p:pic>
+        <p:nvPicPr>
+          <p:cNvPr name="Picture 2" id="2"/>
+          <p:cNvPicPr>
+            <a:picLocks noChangeAspect="true"/>
+          </p:cNvPicPr>
+          <p:nvPr/>
+        </p:nvPicPr>
+        <p:blipFill>
+          <a:blip r:embed="rId2"/>
+          <a:stretch>
+            <a:fillRect/>
+          </a:stretch>
+        </p:blipFill>
+        <p:spPr>
+          <a:xfrm>
+            <a:off x="0" y="0"/>
+            <a:ext cx="12192000" cy="6858000"/>
+          </a:xfrm>
+          <a:prstGeom prst="rect">
+            <a:avLst/>
+          </a:prstGeom>
+        </p:spPr>
+      </p:pic>
+      <p:sp>
+        <p:nvSpPr>
+          <p:cNvPr name="TextBox 3" id="3"/>
+          <p:cNvSpPr txBox="true"/>
+          <p:nvPr/>
+        </p:nvSpPr>
+        <p:spPr>
+          <a:xfrm>
+            <a:off x="4953000" y="-190500"/>
+            <a:ext cx="9525000" cy="762000"/>
+          </a:xfrm>
+          <a:prstGeom prst="rect">
+            <a:avLst/>
+          </a:prstGeom>
+        </p:spPr>
+        <p:txBody>
+          <a:bodyPr anchor="t" rtlCol="false"/>
+          <a:lstStyle/>
+          <a:p>
+            <a:pPr algn="l">
+              <a:defRPr/>
+            </a:pPr>
+            <a:r>
+              <a:rPr lang="fr-FR"/>
+              <a:t/>
+            </a:r>
+            <a:endParaRPr lang="en-US" sz="1100"/>
+          </a:p>
+          <a:p>
+            <a:pPr algn="l"/>
+            <a:r>
+              <a:rPr lang="en-US" sz="2900" b="true">
+                <a:solidFill>
+                  <a:srgbClr val="D1AC65"/>
+                </a:solidFill>
+                <a:latin typeface="Verdana"/>
+              </a:rPr>
+              <a:t>FIHIRANA 487 : 1</a:t>
+            </a:r>
+          </a:p>
+        </p:txBody>
+      </p:sp>
+      <p:sp>
+        <p:nvSpPr>
+          <p:cNvPr name="TextBox 4" id="4"/>
+          <p:cNvSpPr txBox="true"/>
+          <p:nvPr/>
+        </p:nvSpPr>
+        <p:spPr>
+          <a:xfrm>
+            <a:off x="685800" y="508000"/>
+            <a:ext cx="10922000" cy="5080000"/>
+          </a:xfrm>
+          <a:prstGeom prst="rect">
+            <a:avLst/>
+          </a:prstGeom>
+        </p:spPr>
+        <p:txBody>
+          <a:bodyPr anchor="t" rtlCol="false"/>
+          <a:lstStyle/>
+          <a:p>
+            <a:pPr algn="l">
+              <a:defRPr/>
+            </a:pPr>
+            <a:r>
+              <a:rPr lang="fr-FR"/>
+              <a:t/>
+            </a:r>
+            <a:endParaRPr lang="en-US" sz="1100"/>
+          </a:p>
+          <a:p>
+            <a:pPr algn="ctr"/>
+            <a:r>
+              <a:rPr lang="en-US" sz="4500" b="true">
+                <a:solidFill>
+                  <a:srgbClr val="D1AC65"/>
+                </a:solidFill>
+                <a:latin typeface="Verdana"/>
+              </a:rPr>
+              <a:t>1- </a:t>
+            </a:r>
+            <a:r>
+              <a:rPr lang="en-US" sz="4500" b="true">
+                <a:solidFill>
+                  <a:srgbClr val="FFFFFF"/>
+                </a:solidFill>
+                <a:latin typeface="Verdana"/>
+              </a:rPr>
+              <a:t>Fanavaozan'izay mahagaga tokoa</a:t>
+            </a:r>
+          </a:p>
+          <a:p>
+            <a:pPr algn="ctr"/>
+            <a:r>
+              <a:rPr lang="en-US" sz="4500" b="true">
+                <a:solidFill>
+                  <a:srgbClr val="FFFFFF"/>
+                </a:solidFill>
+                <a:latin typeface="Verdana"/>
+              </a:rPr>
+              <a:t>Nomen'i Jeso ahy re,</a:t>
+            </a:r>
+          </a:p>
+          <a:p>
+            <a:pPr algn="ctr"/>
+            <a:r>
+              <a:rPr lang="en-US" sz="4500" b="true">
+                <a:solidFill>
+                  <a:srgbClr val="FFFFFF"/>
+                </a:solidFill>
+                <a:latin typeface="Verdana"/>
+              </a:rPr>
+              <a:t>Fahazavan'ny fanahy izay mahafa-po</a:t>
+            </a:r>
+          </a:p>
+          <a:p>
+            <a:pPr algn="ctr"/>
+            <a:r>
+              <a:rPr lang="en-US" sz="4500" b="true">
+                <a:solidFill>
+                  <a:srgbClr val="FFFFFF"/>
+                </a:solidFill>
+                <a:latin typeface="Verdana"/>
+              </a:rPr>
+              <a:t>Nomen'i Jeso ahy re,</a:t>
+            </a:r>
+          </a:p>
+        </p:txBody>
+      </p:sp>
+    </p:spTree>
+  </p:cSld>
+  <p:clrMapOvr>
+    <a:masterClrMapping/>
+  </p:clrMapOvr>
+</p:sld>
+</file>
+
+<file path=ppt/slides/slide25.xml><?xml version="1.0" encoding="utf-8"?>
+<p:sld xmlns:p="http://schemas.openxmlformats.org/presentationml/2006/main" xmlns:a="http://schemas.openxmlformats.org/drawingml/2006/main" xmlns:r="http://schemas.openxmlformats.org/officeDocument/2006/relationships">
+  <p:cSld>
+    <p:spTree>
+      <p:nvGrpSpPr>
+        <p:cNvPr id="1" name=""/>
+        <p:cNvGrpSpPr/>
+        <p:nvPr/>
+      </p:nvGrpSpPr>
+      <p:grpSpPr>
+        <a:xfrm>
+          <a:off x="0" y="0"/>
+          <a:ext cx="0" cy="0"/>
+          <a:chOff x="0" y="0"/>
+          <a:chExt cx="0" cy="0"/>
+        </a:xfrm>
+      </p:grpSpPr>
+      <p:pic>
+        <p:nvPicPr>
+          <p:cNvPr name="Picture 2" id="2"/>
+          <p:cNvPicPr>
+            <a:picLocks noChangeAspect="true"/>
+          </p:cNvPicPr>
+          <p:nvPr/>
+        </p:nvPicPr>
+        <p:blipFill>
+          <a:blip r:embed="rId2"/>
+          <a:stretch>
+            <a:fillRect/>
+          </a:stretch>
+        </p:blipFill>
+        <p:spPr>
+          <a:xfrm>
+            <a:off x="0" y="0"/>
+            <a:ext cx="12192000" cy="6858000"/>
+          </a:xfrm>
+          <a:prstGeom prst="rect">
+            <a:avLst/>
+          </a:prstGeom>
+        </p:spPr>
+      </p:pic>
+      <p:sp>
+        <p:nvSpPr>
+          <p:cNvPr name="TextBox 3" id="3"/>
+          <p:cNvSpPr txBox="true"/>
+          <p:nvPr/>
+        </p:nvSpPr>
+        <p:spPr>
+          <a:xfrm>
+            <a:off x="4953000" y="-190500"/>
+            <a:ext cx="9525000" cy="762000"/>
+          </a:xfrm>
+          <a:prstGeom prst="rect">
+            <a:avLst/>
+          </a:prstGeom>
+        </p:spPr>
+        <p:txBody>
+          <a:bodyPr anchor="t" rtlCol="false"/>
+          <a:lstStyle/>
+          <a:p>
+            <a:pPr algn="l">
+              <a:defRPr/>
+            </a:pPr>
+            <a:r>
+              <a:rPr lang="fr-FR"/>
+              <a:t/>
+            </a:r>
+            <a:endParaRPr lang="en-US" sz="1100"/>
+          </a:p>
+          <a:p>
+            <a:pPr algn="l"/>
+            <a:r>
+              <a:rPr lang="en-US" sz="2900" b="true">
+                <a:solidFill>
+                  <a:srgbClr val="D1AC65"/>
+                </a:solidFill>
+                <a:latin typeface="Verdana"/>
+              </a:rPr>
+              <a:t>FIHIRANA 487 : 1</a:t>
+            </a:r>
+          </a:p>
+        </p:txBody>
+      </p:sp>
+      <p:sp>
+        <p:nvSpPr>
+          <p:cNvPr name="TextBox 4" id="4"/>
+          <p:cNvSpPr txBox="true"/>
+          <p:nvPr/>
+        </p:nvSpPr>
+        <p:spPr>
+          <a:xfrm>
+            <a:off x="685800" y="508000"/>
+            <a:ext cx="10922000" cy="5080000"/>
+          </a:xfrm>
+          <a:prstGeom prst="rect">
+            <a:avLst/>
+          </a:prstGeom>
+        </p:spPr>
+        <p:txBody>
+          <a:bodyPr anchor="t" rtlCol="false"/>
+          <a:lstStyle/>
+          <a:p>
+            <a:pPr algn="l">
+              <a:defRPr/>
+            </a:pPr>
+            <a:r>
+              <a:rPr lang="fr-FR"/>
+              <a:t/>
+            </a:r>
+            <a:endParaRPr lang="en-US" sz="1100"/>
+          </a:p>
+          <a:p>
+            <a:pPr algn="ctr"/>
+            <a:r>
+              <a:rPr lang="en-US" sz="4500" b="true">
+                <a:solidFill>
+                  <a:srgbClr val="FFFFFF"/>
+                </a:solidFill>
+                <a:latin typeface="Verdana"/>
+              </a:rPr>
+              <a:t>Hatramin'izao dia endrey</a:t>
+            </a:r>
+          </a:p>
+          <a:p>
+            <a:pPr algn="ctr"/>
+            <a:r>
+              <a:rPr lang="en-US" sz="4500" b="true">
+                <a:solidFill>
+                  <a:srgbClr val="FFFFFF"/>
+                </a:solidFill>
+                <a:latin typeface="Verdana"/>
+              </a:rPr>
+              <a:t>Hatramin'izao dia endrey</a:t>
+            </a:r>
+          </a:p>
+          <a:p>
+            <a:pPr algn="ctr"/>
+            <a:r>
+              <a:rPr lang="en-US" sz="4500" b="true">
+                <a:solidFill>
+                  <a:srgbClr val="FFFFFF"/>
+                </a:solidFill>
+                <a:latin typeface="Verdana"/>
+              </a:rPr>
+              <a:t>Ny fitepon'ny foko izay ravo tokoa</a:t>
+            </a:r>
+          </a:p>
+          <a:p>
+            <a:pPr algn="ctr"/>
+            <a:r>
+              <a:rPr lang="en-US" sz="4500" b="true">
+                <a:solidFill>
+                  <a:srgbClr val="FFFFFF"/>
+                </a:solidFill>
+                <a:latin typeface="Verdana"/>
+              </a:rPr>
+              <a:t>Onenan'ny Tompo Jeso.</a:t>
+            </a:r>
+          </a:p>
+        </p:txBody>
+      </p:sp>
+    </p:spTree>
+  </p:cSld>
+  <p:clrMapOvr>
+    <a:masterClrMapping/>
+  </p:clrMapOvr>
+</p:sld>
+</file>
+
+<file path=ppt/slides/slide26.xml><?xml version="1.0" encoding="utf-8"?>
+<p:sld xmlns:p="http://schemas.openxmlformats.org/presentationml/2006/main" xmlns:a="http://schemas.openxmlformats.org/drawingml/2006/main" xmlns:r="http://schemas.openxmlformats.org/officeDocument/2006/relationships">
+  <p:cSld>
+    <p:spTree>
+      <p:nvGrpSpPr>
+        <p:cNvPr id="1" name=""/>
+        <p:cNvGrpSpPr/>
+        <p:nvPr/>
+      </p:nvGrpSpPr>
+      <p:grpSpPr>
+        <a:xfrm>
+          <a:off x="0" y="0"/>
+          <a:ext cx="0" cy="0"/>
+          <a:chOff x="0" y="0"/>
+          <a:chExt cx="0" cy="0"/>
+        </a:xfrm>
+      </p:grpSpPr>
+      <p:pic>
+        <p:nvPicPr>
+          <p:cNvPr name="Picture 2" id="2"/>
+          <p:cNvPicPr>
+            <a:picLocks noChangeAspect="true"/>
+          </p:cNvPicPr>
+          <p:nvPr/>
+        </p:nvPicPr>
+        <p:blipFill>
+          <a:blip r:embed="rId2"/>
+          <a:stretch>
+            <a:fillRect/>
+          </a:stretch>
+        </p:blipFill>
+        <p:spPr>
+          <a:xfrm>
+            <a:off x="0" y="0"/>
+            <a:ext cx="12192000" cy="6858000"/>
+          </a:xfrm>
+          <a:prstGeom prst="rect">
+            <a:avLst/>
+          </a:prstGeom>
+        </p:spPr>
+      </p:pic>
+      <p:sp>
+        <p:nvSpPr>
+          <p:cNvPr name="TextBox 3" id="3"/>
+          <p:cNvSpPr txBox="true"/>
+          <p:nvPr/>
+        </p:nvSpPr>
+        <p:spPr>
+          <a:xfrm>
+            <a:off x="4953000" y="-190500"/>
+            <a:ext cx="9525000" cy="762000"/>
+          </a:xfrm>
+          <a:prstGeom prst="rect">
+            <a:avLst/>
+          </a:prstGeom>
+        </p:spPr>
+        <p:txBody>
+          <a:bodyPr anchor="t" rtlCol="false"/>
+          <a:lstStyle/>
+          <a:p>
+            <a:pPr algn="l">
+              <a:defRPr/>
+            </a:pPr>
+            <a:r>
+              <a:rPr lang="fr-FR"/>
+              <a:t/>
+            </a:r>
+            <a:endParaRPr lang="en-US" sz="1100"/>
+          </a:p>
+          <a:p>
+            <a:pPr algn="l"/>
+            <a:r>
+              <a:rPr lang="en-US" sz="2900" b="true">
+                <a:solidFill>
+                  <a:srgbClr val="D1AC65"/>
+                </a:solidFill>
+                <a:latin typeface="Verdana"/>
+              </a:rPr>
+              <a:t>FIHIRANA 205 : 2</a:t>
+            </a:r>
+          </a:p>
+        </p:txBody>
+      </p:sp>
+      <p:sp>
+        <p:nvSpPr>
+          <p:cNvPr name="TextBox 4" id="4"/>
+          <p:cNvSpPr txBox="true"/>
+          <p:nvPr/>
+        </p:nvSpPr>
+        <p:spPr>
+          <a:xfrm>
+            <a:off x="685800" y="508000"/>
+            <a:ext cx="10922000" cy="5080000"/>
+          </a:xfrm>
+          <a:prstGeom prst="rect">
+            <a:avLst/>
+          </a:prstGeom>
+        </p:spPr>
+        <p:txBody>
+          <a:bodyPr anchor="t" rtlCol="false"/>
+          <a:lstStyle/>
+          <a:p>
+            <a:pPr algn="l">
+              <a:defRPr/>
+            </a:pPr>
+            <a:r>
+              <a:rPr lang="fr-FR"/>
+              <a:t/>
+            </a:r>
+            <a:endParaRPr lang="en-US" sz="1100"/>
+          </a:p>
+          <a:p>
+            <a:pPr algn="ctr"/>
+            <a:r>
+              <a:rPr lang="en-US" sz="4500" b="true">
+                <a:solidFill>
+                  <a:srgbClr val="D1AC65"/>
+                </a:solidFill>
+                <a:latin typeface="Verdana"/>
+              </a:rPr>
+              <a:t>2- </a:t>
+            </a:r>
+            <a:r>
+              <a:rPr lang="en-US" sz="4500" b="true">
+                <a:solidFill>
+                  <a:srgbClr val="FFFFFF"/>
+                </a:solidFill>
+                <a:latin typeface="Verdana"/>
+              </a:rPr>
+              <a:t>Ny tenin'ny Baiboly</a:t>
+            </a:r>
+          </a:p>
+          <a:p>
+            <a:pPr algn="ctr"/>
+            <a:r>
+              <a:rPr lang="en-US" sz="4500" b="true">
+                <a:solidFill>
+                  <a:srgbClr val="FFFFFF"/>
+                </a:solidFill>
+                <a:latin typeface="Verdana"/>
+              </a:rPr>
+              <a:t>No sabatra entinay</a:t>
+            </a:r>
+          </a:p>
+          <a:p>
+            <a:pPr algn="ctr"/>
+            <a:r>
+              <a:rPr lang="en-US" sz="4500" b="true">
+                <a:solidFill>
+                  <a:srgbClr val="FFFFFF"/>
+                </a:solidFill>
+                <a:latin typeface="Verdana"/>
+              </a:rPr>
+              <a:t>Handresy ny devoly,</a:t>
+            </a:r>
+          </a:p>
+          <a:p>
+            <a:pPr algn="ctr"/>
+            <a:r>
+              <a:rPr lang="en-US" sz="4500" b="true">
+                <a:solidFill>
+                  <a:srgbClr val="FFFFFF"/>
+                </a:solidFill>
+                <a:latin typeface="Verdana"/>
+              </a:rPr>
+              <a:t>'Lay fahavalonay;</a:t>
+            </a:r>
+          </a:p>
+        </p:txBody>
+      </p:sp>
+    </p:spTree>
+  </p:cSld>
+  <p:clrMapOvr>
+    <a:masterClrMapping/>
+  </p:clrMapOvr>
+</p:sld>
+</file>
+
+<file path=ppt/slides/slide27.xml><?xml version="1.0" encoding="utf-8"?>
+<p:sld xmlns:p="http://schemas.openxmlformats.org/presentationml/2006/main" xmlns:a="http://schemas.openxmlformats.org/drawingml/2006/main" xmlns:r="http://schemas.openxmlformats.org/officeDocument/2006/relationships">
+  <p:cSld>
+    <p:spTree>
+      <p:nvGrpSpPr>
+        <p:cNvPr id="1" name=""/>
+        <p:cNvGrpSpPr/>
+        <p:nvPr/>
+      </p:nvGrpSpPr>
+      <p:grpSpPr>
+        <a:xfrm>
+          <a:off x="0" y="0"/>
+          <a:ext cx="0" cy="0"/>
+          <a:chOff x="0" y="0"/>
+          <a:chExt cx="0" cy="0"/>
+        </a:xfrm>
+      </p:grpSpPr>
+      <p:pic>
+        <p:nvPicPr>
+          <p:cNvPr name="Picture 2" id="2"/>
+          <p:cNvPicPr>
+            <a:picLocks noChangeAspect="true"/>
+          </p:cNvPicPr>
+          <p:nvPr/>
+        </p:nvPicPr>
+        <p:blipFill>
+          <a:blip r:embed="rId2"/>
+          <a:stretch>
+            <a:fillRect/>
+          </a:stretch>
+        </p:blipFill>
+        <p:spPr>
+          <a:xfrm>
+            <a:off x="0" y="0"/>
+            <a:ext cx="12192000" cy="6858000"/>
+          </a:xfrm>
+          <a:prstGeom prst="rect">
+            <a:avLst/>
+          </a:prstGeom>
+        </p:spPr>
+      </p:pic>
+      <p:sp>
+        <p:nvSpPr>
+          <p:cNvPr name="TextBox 3" id="3"/>
+          <p:cNvSpPr txBox="true"/>
+          <p:nvPr/>
+        </p:nvSpPr>
+        <p:spPr>
+          <a:xfrm>
+            <a:off x="4953000" y="-190500"/>
+            <a:ext cx="9525000" cy="762000"/>
+          </a:xfrm>
+          <a:prstGeom prst="rect">
+            <a:avLst/>
+          </a:prstGeom>
+        </p:spPr>
+        <p:txBody>
+          <a:bodyPr anchor="t" rtlCol="false"/>
+          <a:lstStyle/>
+          <a:p>
+            <a:pPr algn="l">
+              <a:defRPr/>
+            </a:pPr>
+            <a:r>
+              <a:rPr lang="fr-FR"/>
+              <a:t/>
+            </a:r>
+            <a:endParaRPr lang="en-US" sz="1100"/>
+          </a:p>
+          <a:p>
+            <a:pPr algn="l"/>
+            <a:r>
+              <a:rPr lang="en-US" sz="2900" b="true">
+                <a:solidFill>
+                  <a:srgbClr val="D1AC65"/>
+                </a:solidFill>
+                <a:latin typeface="Verdana"/>
+              </a:rPr>
+              <a:t>FIHIRANA 205 : 2</a:t>
+            </a:r>
+          </a:p>
+        </p:txBody>
+      </p:sp>
+      <p:sp>
+        <p:nvSpPr>
+          <p:cNvPr name="TextBox 4" id="4"/>
+          <p:cNvSpPr txBox="true"/>
+          <p:nvPr/>
+        </p:nvSpPr>
+        <p:spPr>
+          <a:xfrm>
+            <a:off x="685800" y="508000"/>
+            <a:ext cx="10922000" cy="5080000"/>
+          </a:xfrm>
+          <a:prstGeom prst="rect">
+            <a:avLst/>
+          </a:prstGeom>
+        </p:spPr>
+        <p:txBody>
+          <a:bodyPr anchor="t" rtlCol="false"/>
+          <a:lstStyle/>
+          <a:p>
+            <a:pPr algn="l">
+              <a:defRPr/>
+            </a:pPr>
+            <a:r>
+              <a:rPr lang="fr-FR"/>
+              <a:t/>
+            </a:r>
+            <a:endParaRPr lang="en-US" sz="1100"/>
+          </a:p>
+          <a:p>
+            <a:pPr algn="ctr"/>
+            <a:r>
+              <a:rPr lang="en-US" sz="4500" b="true">
+                <a:solidFill>
+                  <a:srgbClr val="FFFFFF"/>
+                </a:solidFill>
+                <a:latin typeface="Verdana"/>
+              </a:rPr>
+              <a:t>Raha misy mampahory,</a:t>
+            </a:r>
+          </a:p>
+          <a:p>
+            <a:pPr algn="ctr"/>
+            <a:r>
+              <a:rPr lang="en-US" sz="4500" b="true">
+                <a:solidFill>
+                  <a:srgbClr val="FFFFFF"/>
+                </a:solidFill>
+                <a:latin typeface="Verdana"/>
+              </a:rPr>
+              <a:t>Ka osa izahay</a:t>
+            </a:r>
+          </a:p>
+          <a:p>
+            <a:pPr algn="ctr"/>
+            <a:r>
+              <a:rPr lang="en-US" sz="4500" b="true">
+                <a:solidFill>
+                  <a:srgbClr val="FFFFFF"/>
+                </a:solidFill>
+                <a:latin typeface="Verdana"/>
+              </a:rPr>
+              <a:t>Ny teninao mahery</a:t>
+            </a:r>
+          </a:p>
+          <a:p>
+            <a:pPr algn="ctr"/>
+            <a:r>
+              <a:rPr lang="en-US" sz="4500" b="true">
+                <a:solidFill>
+                  <a:srgbClr val="FFFFFF"/>
+                </a:solidFill>
+                <a:latin typeface="Verdana"/>
+              </a:rPr>
+              <a:t>Manjary tanjakay</a:t>
+            </a:r>
+          </a:p>
+        </p:txBody>
+      </p:sp>
+    </p:spTree>
+  </p:cSld>
+  <p:clrMapOvr>
+    <a:masterClrMapping/>
+  </p:clrMapOvr>
+</p:sld>
+</file>
+
+<file path=ppt/slides/slide28.xml><?xml version="1.0" encoding="utf-8"?>
+<p:sld xmlns:p="http://schemas.openxmlformats.org/presentationml/2006/main" xmlns:a="http://schemas.openxmlformats.org/drawingml/2006/main" xmlns:r="http://schemas.openxmlformats.org/officeDocument/2006/relationships">
+  <p:cSld>
+    <p:spTree>
+      <p:nvGrpSpPr>
+        <p:cNvPr id="1" name=""/>
+        <p:cNvGrpSpPr/>
+        <p:nvPr/>
+      </p:nvGrpSpPr>
+      <p:grpSpPr>
+        <a:xfrm>
+          <a:off x="0" y="0"/>
+          <a:ext cx="0" cy="0"/>
+          <a:chOff x="0" y="0"/>
+          <a:chExt cx="0" cy="0"/>
+        </a:xfrm>
+      </p:grpSpPr>
+      <p:pic>
+        <p:nvPicPr>
+          <p:cNvPr name="Picture 2" id="2"/>
+          <p:cNvPicPr>
+            <a:picLocks noChangeAspect="true"/>
+          </p:cNvPicPr>
+          <p:nvPr/>
+        </p:nvPicPr>
+        <p:blipFill>
+          <a:blip r:embed="rId2"/>
+          <a:stretch>
+            <a:fillRect/>
+          </a:stretch>
+        </p:blipFill>
+        <p:spPr>
+          <a:xfrm>
+            <a:off x="0" y="0"/>
+            <a:ext cx="12192000" cy="6858000"/>
+          </a:xfrm>
+          <a:prstGeom prst="rect">
+            <a:avLst/>
+          </a:prstGeom>
+        </p:spPr>
+      </p:pic>
+      <p:sp>
+        <p:nvSpPr>
+          <p:cNvPr name="TextBox 3" id="3"/>
+          <p:cNvSpPr txBox="true"/>
+          <p:nvPr/>
+        </p:nvSpPr>
+        <p:spPr>
+          <a:xfrm>
+            <a:off x="4953000" y="-190500"/>
+            <a:ext cx="9525000" cy="762000"/>
+          </a:xfrm>
+          <a:prstGeom prst="rect">
+            <a:avLst/>
+          </a:prstGeom>
+        </p:spPr>
+        <p:txBody>
+          <a:bodyPr anchor="t" rtlCol="false"/>
+          <a:lstStyle/>
+          <a:p>
+            <a:pPr algn="l">
+              <a:defRPr/>
+            </a:pPr>
+            <a:r>
+              <a:rPr lang="fr-FR"/>
+              <a:t/>
+            </a:r>
+            <a:endParaRPr lang="en-US" sz="1100"/>
+          </a:p>
+          <a:p>
+            <a:pPr algn="l"/>
+            <a:r>
+              <a:rPr lang="en-US" sz="2900" b="true">
+                <a:solidFill>
+                  <a:srgbClr val="D1AC65"/>
+                </a:solidFill>
+                <a:latin typeface="Verdana"/>
+              </a:rPr>
+              <a:t>FIHIRANA 354 : 3</a:t>
+            </a:r>
+          </a:p>
+        </p:txBody>
+      </p:sp>
+      <p:sp>
+        <p:nvSpPr>
+          <p:cNvPr name="TextBox 4" id="4"/>
+          <p:cNvSpPr txBox="true"/>
+          <p:nvPr/>
+        </p:nvSpPr>
+        <p:spPr>
+          <a:xfrm>
+            <a:off x="685800" y="508000"/>
+            <a:ext cx="10922000" cy="5080000"/>
+          </a:xfrm>
+          <a:prstGeom prst="rect">
+            <a:avLst/>
+          </a:prstGeom>
+        </p:spPr>
+        <p:txBody>
+          <a:bodyPr anchor="t" rtlCol="false"/>
+          <a:lstStyle/>
+          <a:p>
+            <a:pPr algn="l">
+              <a:defRPr/>
+            </a:pPr>
+            <a:r>
+              <a:rPr lang="fr-FR"/>
+              <a:t/>
+            </a:r>
+            <a:endParaRPr lang="en-US" sz="1100"/>
+          </a:p>
+          <a:p>
+            <a:pPr algn="ctr"/>
+            <a:r>
+              <a:rPr lang="en-US" sz="4500" b="true">
+                <a:solidFill>
+                  <a:srgbClr val="D1AC65"/>
+                </a:solidFill>
+                <a:latin typeface="Verdana"/>
+              </a:rPr>
+              <a:t>3- </a:t>
+            </a:r>
+            <a:r>
+              <a:rPr lang="en-US" sz="4500" b="true">
+                <a:solidFill>
+                  <a:srgbClr val="FFFFFF"/>
+                </a:solidFill>
+                <a:latin typeface="Verdana"/>
+              </a:rPr>
+              <a:t>Sao ity no toriteny</a:t>
+            </a:r>
+          </a:p>
+          <a:p>
+            <a:pPr algn="ctr"/>
+            <a:r>
+              <a:rPr lang="en-US" sz="4500" b="true">
+                <a:solidFill>
+                  <a:srgbClr val="FFFFFF"/>
+                </a:solidFill>
+                <a:latin typeface="Verdana"/>
+              </a:rPr>
+              <a:t>Fara-fanasana anao;</a:t>
+            </a:r>
+          </a:p>
+          <a:p>
+            <a:pPr algn="ctr"/>
+            <a:r>
+              <a:rPr lang="en-US" sz="4500" b="true">
+                <a:solidFill>
+                  <a:srgbClr val="FFFFFF"/>
+                </a:solidFill>
+                <a:latin typeface="Verdana"/>
+              </a:rPr>
+              <a:t>Sao anio no fotoana</a:t>
+            </a:r>
+          </a:p>
+          <a:p>
+            <a:pPr algn="ctr"/>
+            <a:r>
+              <a:rPr lang="en-US" sz="4500" b="true">
+                <a:solidFill>
+                  <a:srgbClr val="FFFFFF"/>
+                </a:solidFill>
+                <a:latin typeface="Verdana"/>
+              </a:rPr>
+              <a:t>Fara-ahavelomanao;</a:t>
+            </a:r>
+          </a:p>
+        </p:txBody>
+      </p:sp>
+    </p:spTree>
+  </p:cSld>
+  <p:clrMapOvr>
+    <a:masterClrMapping/>
+  </p:clrMapOvr>
+</p:sld>
+</file>
+
+<file path=ppt/slides/slide29.xml><?xml version="1.0" encoding="utf-8"?>
+<p:sld xmlns:p="http://schemas.openxmlformats.org/presentationml/2006/main" xmlns:a="http://schemas.openxmlformats.org/drawingml/2006/main" xmlns:r="http://schemas.openxmlformats.org/officeDocument/2006/relationships">
+  <p:cSld>
+    <p:spTree>
+      <p:nvGrpSpPr>
+        <p:cNvPr id="1" name=""/>
+        <p:cNvGrpSpPr/>
+        <p:nvPr/>
+      </p:nvGrpSpPr>
+      <p:grpSpPr>
+        <a:xfrm>
+          <a:off x="0" y="0"/>
+          <a:ext cx="0" cy="0"/>
+          <a:chOff x="0" y="0"/>
+          <a:chExt cx="0" cy="0"/>
+        </a:xfrm>
+      </p:grpSpPr>
+      <p:pic>
+        <p:nvPicPr>
+          <p:cNvPr name="Picture 2" id="2"/>
+          <p:cNvPicPr>
+            <a:picLocks noChangeAspect="true"/>
+          </p:cNvPicPr>
+          <p:nvPr/>
+        </p:nvPicPr>
+        <p:blipFill>
+          <a:blip r:embed="rId2"/>
+          <a:stretch>
+            <a:fillRect/>
+          </a:stretch>
+        </p:blipFill>
+        <p:spPr>
+          <a:xfrm>
+            <a:off x="0" y="0"/>
+            <a:ext cx="12192000" cy="6858000"/>
+          </a:xfrm>
+          <a:prstGeom prst="rect">
+            <a:avLst/>
+          </a:prstGeom>
+        </p:spPr>
+      </p:pic>
+      <p:sp>
+        <p:nvSpPr>
+          <p:cNvPr name="TextBox 3" id="3"/>
+          <p:cNvSpPr txBox="true"/>
+          <p:nvPr/>
+        </p:nvSpPr>
+        <p:spPr>
+          <a:xfrm>
+            <a:off x="4953000" y="-190500"/>
+            <a:ext cx="9525000" cy="762000"/>
+          </a:xfrm>
+          <a:prstGeom prst="rect">
+            <a:avLst/>
+          </a:prstGeom>
+        </p:spPr>
+        <p:txBody>
+          <a:bodyPr anchor="t" rtlCol="false"/>
+          <a:lstStyle/>
+          <a:p>
+            <a:pPr algn="l">
+              <a:defRPr/>
+            </a:pPr>
+            <a:r>
+              <a:rPr lang="fr-FR"/>
+              <a:t/>
+            </a:r>
+            <a:endParaRPr lang="en-US" sz="1100"/>
+          </a:p>
+          <a:p>
+            <a:pPr algn="l"/>
+            <a:r>
+              <a:rPr lang="en-US" sz="2900" b="true">
+                <a:solidFill>
+                  <a:srgbClr val="D1AC65"/>
+                </a:solidFill>
+                <a:latin typeface="Verdana"/>
+              </a:rPr>
+              <a:t>FIHIRANA 354 : 3</a:t>
+            </a:r>
+          </a:p>
+        </p:txBody>
+      </p:sp>
+      <p:sp>
+        <p:nvSpPr>
+          <p:cNvPr name="TextBox 4" id="4"/>
+          <p:cNvSpPr txBox="true"/>
+          <p:nvPr/>
+        </p:nvSpPr>
+        <p:spPr>
+          <a:xfrm>
+            <a:off x="685800" y="508000"/>
+            <a:ext cx="10922000" cy="5080000"/>
+          </a:xfrm>
+          <a:prstGeom prst="rect">
+            <a:avLst/>
+          </a:prstGeom>
+        </p:spPr>
+        <p:txBody>
+          <a:bodyPr anchor="t" rtlCol="false"/>
+          <a:lstStyle/>
+          <a:p>
+            <a:pPr algn="l">
+              <a:defRPr/>
+            </a:pPr>
+            <a:r>
+              <a:rPr lang="fr-FR"/>
+              <a:t/>
+            </a:r>
+            <a:endParaRPr lang="en-US" sz="1100"/>
+          </a:p>
+          <a:p>
+            <a:pPr algn="ctr"/>
+            <a:r>
+              <a:rPr lang="en-US" sz="4500" b="true">
+                <a:solidFill>
+                  <a:srgbClr val="FFFFFF"/>
+                </a:solidFill>
+                <a:latin typeface="Verdana"/>
+              </a:rPr>
+              <a:t>Ka aza mba misalasala,</a:t>
+            </a:r>
+          </a:p>
+          <a:p>
+            <a:pPr algn="ctr"/>
+            <a:r>
+              <a:rPr lang="en-US" sz="4500" b="true">
+                <a:solidFill>
+                  <a:srgbClr val="FFFFFF"/>
+                </a:solidFill>
+                <a:latin typeface="Verdana"/>
+              </a:rPr>
+              <a:t>Sao manjary neninao,</a:t>
+            </a:r>
+          </a:p>
+          <a:p>
+            <a:pPr algn="ctr"/>
+            <a:r>
+              <a:rPr lang="en-US" sz="4500" b="true">
+                <a:solidFill>
+                  <a:srgbClr val="FFFFFF"/>
+                </a:solidFill>
+                <a:latin typeface="Verdana"/>
+              </a:rPr>
+              <a:t>Raha tsy mety mahalala</a:t>
+            </a:r>
+          </a:p>
+          <a:p>
+            <a:pPr algn="ctr"/>
+            <a:r>
+              <a:rPr lang="en-US" sz="4500" b="true">
+                <a:solidFill>
+                  <a:srgbClr val="FFFFFF"/>
+                </a:solidFill>
+                <a:latin typeface="Verdana"/>
+              </a:rPr>
+              <a:t>Izao fotoana mety izao.</a:t>
             </a:r>
           </a:p>
         </p:txBody>
@@ -5350,6 +6495,55 @@
           </a:prstGeom>
         </p:spPr>
       </p:pic>
+    </p:spTree>
+  </p:cSld>
+  <p:clrMapOvr>
+    <a:masterClrMapping/>
+  </p:clrMapOvr>
+</p:sld>
+</file>
+
+<file path=ppt/slides/slide30.xml><?xml version="1.0" encoding="utf-8"?>
+<p:sld xmlns:p="http://schemas.openxmlformats.org/presentationml/2006/main" xmlns:a="http://schemas.openxmlformats.org/drawingml/2006/main" xmlns:r="http://schemas.openxmlformats.org/officeDocument/2006/relationships">
+  <p:cSld>
+    <p:spTree>
+      <p:nvGrpSpPr>
+        <p:cNvPr id="1" name=""/>
+        <p:cNvGrpSpPr/>
+        <p:nvPr/>
+      </p:nvGrpSpPr>
+      <p:grpSpPr>
+        <a:xfrm>
+          <a:off x="0" y="0"/>
+          <a:ext cx="0" cy="0"/>
+          <a:chOff x="0" y="0"/>
+          <a:chExt cx="0" cy="0"/>
+        </a:xfrm>
+      </p:grpSpPr>
+      <p:pic>
+        <p:nvPicPr>
+          <p:cNvPr name="Picture 2" id="2"/>
+          <p:cNvPicPr>
+            <a:picLocks noChangeAspect="true"/>
+          </p:cNvPicPr>
+          <p:nvPr/>
+        </p:nvPicPr>
+        <p:blipFill>
+          <a:blip r:embed="rId2"/>
+          <a:stretch>
+            <a:fillRect/>
+          </a:stretch>
+        </p:blipFill>
+        <p:spPr>
+          <a:xfrm>
+            <a:off x="0" y="0"/>
+            <a:ext cx="12192000" cy="6858000"/>
+          </a:xfrm>
+          <a:prstGeom prst="rect">
+            <a:avLst/>
+          </a:prstGeom>
+        </p:spPr>
+      </p:pic>
       <p:sp>
         <p:nvSpPr>
           <p:cNvPr name="TextBox 3" id="3"/>
@@ -5373,7 +6567,7 @@
               <a:defRPr/>
             </a:pPr>
             <a:r>
-              <a:rPr lang="fr-MG"/>
+              <a:rPr lang="fr-FR"/>
               <a:t/>
             </a:r>
             <a:endParaRPr lang="en-US" sz="1100"/>
@@ -5387,7 +6581,7 @@
                 </a:solidFill>
                 <a:latin typeface="Verdana"/>
               </a:rPr>
-              <a:t>FIHIRANA 171 : 1, 3</a:t>
+              <a:t>FIHIRANA 547 : 4</a:t>
             </a:r>
           </a:p>
         </p:txBody>
@@ -5415,7 +6609,7 @@
               <a:defRPr/>
             </a:pPr>
             <a:r>
-              <a:rPr lang="fr-MG"/>
+              <a:rPr lang="fr-FR"/>
               <a:t/>
             </a:r>
             <a:endParaRPr lang="en-US" sz="1100"/>
@@ -5425,47 +6619,225 @@
             <a:r>
               <a:rPr lang="en-US" sz="4500" b="true">
                 <a:solidFill>
-                  <a:srgbClr val="FFFFFF"/>
-                </a:solidFill>
-                <a:latin typeface="Verdana"/>
-              </a:rPr>
-              <a:t>Ry Tompo Mpanjaka mahery ô!</a:t>
-            </a:r>
-          </a:p>
-          <a:p>
-            <a:pPr algn="ctr"/>
-            <a:r>
-              <a:rPr lang="en-US" sz="4500" b="true">
-                <a:solidFill>
-                  <a:srgbClr val="FFFFFF"/>
-                </a:solidFill>
-                <a:latin typeface="Verdana"/>
-              </a:rPr>
-              <a:t>Mihainoa ! Mihainoa !</a:t>
-            </a:r>
-          </a:p>
-          <a:p>
-            <a:pPr algn="ctr"/>
-            <a:r>
-              <a:rPr lang="en-US" sz="4500" b="true">
-                <a:solidFill>
-                  <a:srgbClr val="FFFFFF"/>
-                </a:solidFill>
-                <a:latin typeface="Verdana"/>
-              </a:rPr>
-              <a:t>Avy manaiky tokoa 'zahay</a:t>
-            </a:r>
-          </a:p>
-          <a:p>
-            <a:pPr algn="ctr"/>
-            <a:r>
-              <a:rPr lang="en-US" sz="4500" b="true">
-                <a:solidFill>
-                  <a:srgbClr val="FFFFFF"/>
-                </a:solidFill>
-                <a:latin typeface="Verdana"/>
-              </a:rPr>
-              <a:t>Fa Tompon'ny hery rehetra Hianao,</a:t>
+                  <a:srgbClr val="D1AC65"/>
+                </a:solidFill>
+                <a:latin typeface="Verdana"/>
+              </a:rPr>
+              <a:t>4- </a:t>
+            </a:r>
+            <a:r>
+              <a:rPr lang="en-US" sz="4500" b="true">
+                <a:solidFill>
+                  <a:srgbClr val="FFFFFF"/>
+                </a:solidFill>
+                <a:latin typeface="Verdana"/>
+              </a:rPr>
+              <a:t>Ry Jeso Tompo tia anay ô!</a:t>
+            </a:r>
+          </a:p>
+          <a:p>
+            <a:pPr algn="ctr"/>
+            <a:r>
+              <a:rPr lang="en-US" sz="4500" b="true">
+                <a:solidFill>
+                  <a:srgbClr val="FFFFFF"/>
+                </a:solidFill>
+                <a:latin typeface="Verdana"/>
+              </a:rPr>
+              <a:t>Misaotra Anao izahay izao</a:t>
+            </a:r>
+          </a:p>
+          <a:p>
+            <a:pPr algn="ctr"/>
+            <a:r>
+              <a:rPr lang="en-US" sz="4500" b="true">
+                <a:solidFill>
+                  <a:srgbClr val="FFFFFF"/>
+                </a:solidFill>
+                <a:latin typeface="Verdana"/>
+              </a:rPr>
+              <a:t>Fa henika ny hasoavanao</a:t>
+            </a:r>
+          </a:p>
+          <a:p>
+            <a:pPr algn="ctr"/>
+            <a:r>
+              <a:rPr lang="en-US" sz="4500" b="true">
+                <a:solidFill>
+                  <a:srgbClr val="FFFFFF"/>
+                </a:solidFill>
+                <a:latin typeface="Verdana"/>
+              </a:rPr>
+              <a:t>Izao tontolo izao.</a:t>
+            </a:r>
+          </a:p>
+        </p:txBody>
+      </p:sp>
+    </p:spTree>
+  </p:cSld>
+  <p:clrMapOvr>
+    <a:masterClrMapping/>
+  </p:clrMapOvr>
+</p:sld>
+</file>
+
+<file path=ppt/slides/slide31.xml><?xml version="1.0" encoding="utf-8"?>
+<p:sld xmlns:p="http://schemas.openxmlformats.org/presentationml/2006/main" xmlns:a="http://schemas.openxmlformats.org/drawingml/2006/main" xmlns:r="http://schemas.openxmlformats.org/officeDocument/2006/relationships">
+  <p:cSld>
+    <p:spTree>
+      <p:nvGrpSpPr>
+        <p:cNvPr id="1" name=""/>
+        <p:cNvGrpSpPr/>
+        <p:nvPr/>
+      </p:nvGrpSpPr>
+      <p:grpSpPr>
+        <a:xfrm>
+          <a:off x="0" y="0"/>
+          <a:ext cx="0" cy="0"/>
+          <a:chOff x="0" y="0"/>
+          <a:chExt cx="0" cy="0"/>
+        </a:xfrm>
+      </p:grpSpPr>
+      <p:pic>
+        <p:nvPicPr>
+          <p:cNvPr name="Picture 2" id="2"/>
+          <p:cNvPicPr>
+            <a:picLocks noChangeAspect="true"/>
+          </p:cNvPicPr>
+          <p:nvPr/>
+        </p:nvPicPr>
+        <p:blipFill>
+          <a:blip r:embed="rId2"/>
+          <a:stretch>
+            <a:fillRect/>
+          </a:stretch>
+        </p:blipFill>
+        <p:spPr>
+          <a:xfrm>
+            <a:off x="0" y="0"/>
+            <a:ext cx="12192000" cy="6858000"/>
+          </a:xfrm>
+          <a:prstGeom prst="rect">
+            <a:avLst/>
+          </a:prstGeom>
+        </p:spPr>
+      </p:pic>
+      <p:sp>
+        <p:nvSpPr>
+          <p:cNvPr name="TextBox 3" id="3"/>
+          <p:cNvSpPr txBox="true"/>
+          <p:nvPr/>
+        </p:nvSpPr>
+        <p:spPr>
+          <a:xfrm>
+            <a:off x="4953000" y="-190500"/>
+            <a:ext cx="9525000" cy="762000"/>
+          </a:xfrm>
+          <a:prstGeom prst="rect">
+            <a:avLst/>
+          </a:prstGeom>
+        </p:spPr>
+        <p:txBody>
+          <a:bodyPr anchor="t" rtlCol="false"/>
+          <a:lstStyle/>
+          <a:p>
+            <a:pPr algn="l">
+              <a:defRPr/>
+            </a:pPr>
+            <a:r>
+              <a:rPr lang="fr-FR"/>
+              <a:t/>
+            </a:r>
+            <a:endParaRPr lang="en-US" sz="1100"/>
+          </a:p>
+          <a:p>
+            <a:pPr algn="l"/>
+            <a:r>
+              <a:rPr lang="en-US" sz="2900" b="true">
+                <a:solidFill>
+                  <a:srgbClr val="D1AC65"/>
+                </a:solidFill>
+                <a:latin typeface="Verdana"/>
+              </a:rPr>
+              <a:t>FIHIRANA 547 : 4</a:t>
+            </a:r>
+          </a:p>
+        </p:txBody>
+      </p:sp>
+      <p:sp>
+        <p:nvSpPr>
+          <p:cNvPr name="TextBox 4" id="4"/>
+          <p:cNvSpPr txBox="true"/>
+          <p:nvPr/>
+        </p:nvSpPr>
+        <p:spPr>
+          <a:xfrm>
+            <a:off x="685800" y="508000"/>
+            <a:ext cx="10922000" cy="5080000"/>
+          </a:xfrm>
+          <a:prstGeom prst="rect">
+            <a:avLst/>
+          </a:prstGeom>
+        </p:spPr>
+        <p:txBody>
+          <a:bodyPr anchor="t" rtlCol="false"/>
+          <a:lstStyle/>
+          <a:p>
+            <a:pPr algn="l">
+              <a:defRPr/>
+            </a:pPr>
+            <a:r>
+              <a:rPr lang="fr-FR"/>
+              <a:t/>
+            </a:r>
+            <a:endParaRPr lang="en-US" sz="1100"/>
+          </a:p>
+          <a:p>
+            <a:pPr algn="ctr"/>
+            <a:r>
+              <a:rPr lang="en-US" sz="4500" b="true">
+                <a:solidFill>
+                  <a:srgbClr val="FFFFFF"/>
+                </a:solidFill>
+                <a:latin typeface="Verdana"/>
+              </a:rPr>
+              <a:t>Eny, Jeso! Zoky be fitia,</a:t>
+            </a:r>
+          </a:p>
+          <a:p>
+            <a:pPr algn="ctr"/>
+            <a:r>
+              <a:rPr lang="en-US" sz="4500" b="true">
+                <a:solidFill>
+                  <a:srgbClr val="FFFFFF"/>
+                </a:solidFill>
+                <a:latin typeface="Verdana"/>
+              </a:rPr>
+              <a:t>Soa lehibe no nentinao taty,</a:t>
+            </a:r>
+          </a:p>
+          <a:p>
+            <a:pPr algn="ctr"/>
+            <a:r>
+              <a:rPr lang="en-US" sz="4500" b="true">
+                <a:solidFill>
+                  <a:srgbClr val="FFFFFF"/>
+                </a:solidFill>
+                <a:latin typeface="Verdana"/>
+              </a:rPr>
+              <a:t>Avy izahay, mba hisaotra Anao</a:t>
+            </a:r>
+          </a:p>
+          <a:p>
+            <a:pPr algn="ctr"/>
+            <a:r>
+              <a:rPr lang="en-US" sz="4500" b="true">
+                <a:solidFill>
+                  <a:srgbClr val="FFFFFF"/>
+                </a:solidFill>
+                <a:latin typeface="Verdana"/>
+              </a:rPr>
+              <a:t>Noho ny fitiavanao.</a:t>
             </a:r>
           </a:p>
         </p:txBody>
@@ -5519,138 +6891,6 @@
           </a:prstGeom>
         </p:spPr>
       </p:pic>
-      <p:sp>
-        <p:nvSpPr>
-          <p:cNvPr name="TextBox 3" id="3"/>
-          <p:cNvSpPr txBox="true"/>
-          <p:nvPr/>
-        </p:nvSpPr>
-        <p:spPr>
-          <a:xfrm>
-            <a:off x="4953000" y="-190500"/>
-            <a:ext cx="9525000" cy="762000"/>
-          </a:xfrm>
-          <a:prstGeom prst="rect">
-            <a:avLst/>
-          </a:prstGeom>
-        </p:spPr>
-        <p:txBody>
-          <a:bodyPr anchor="t" rtlCol="false"/>
-          <a:lstStyle/>
-          <a:p>
-            <a:pPr algn="l">
-              <a:defRPr/>
-            </a:pPr>
-            <a:r>
-              <a:rPr lang="fr-MG"/>
-              <a:t/>
-            </a:r>
-            <a:endParaRPr lang="en-US" sz="1100"/>
-          </a:p>
-          <a:p>
-            <a:pPr algn="l"/>
-            <a:r>
-              <a:rPr lang="en-US" sz="2900" b="true">
-                <a:solidFill>
-                  <a:srgbClr val="D1AC65"/>
-                </a:solidFill>
-                <a:latin typeface="Verdana"/>
-              </a:rPr>
-              <a:t>FIHIRANA 171 : 1, 3</a:t>
-            </a:r>
-          </a:p>
-        </p:txBody>
-      </p:sp>
-      <p:sp>
-        <p:nvSpPr>
-          <p:cNvPr name="TextBox 4" id="4"/>
-          <p:cNvSpPr txBox="true"/>
-          <p:nvPr/>
-        </p:nvSpPr>
-        <p:spPr>
-          <a:xfrm>
-            <a:off x="685800" y="508000"/>
-            <a:ext cx="10922000" cy="5080000"/>
-          </a:xfrm>
-          <a:prstGeom prst="rect">
-            <a:avLst/>
-          </a:prstGeom>
-        </p:spPr>
-        <p:txBody>
-          <a:bodyPr anchor="t" rtlCol="false"/>
-          <a:lstStyle/>
-          <a:p>
-            <a:pPr algn="l">
-              <a:defRPr/>
-            </a:pPr>
-            <a:r>
-              <a:rPr lang="fr-MG"/>
-              <a:t/>
-            </a:r>
-            <a:endParaRPr lang="en-US" sz="1100"/>
-          </a:p>
-          <a:p>
-            <a:pPr algn="ctr"/>
-            <a:r>
-              <a:rPr lang="en-US" sz="4500" b="true">
-                <a:solidFill>
-                  <a:srgbClr val="FFFFFF"/>
-                </a:solidFill>
-                <a:latin typeface="Verdana"/>
-              </a:rPr>
-              <a:t>Tsy misy mihitsy ny toa Anao</a:t>
-            </a:r>
-          </a:p>
-          <a:p>
-            <a:pPr algn="ctr"/>
-            <a:r>
-              <a:rPr lang="en-US" sz="4500" b="true">
-                <a:solidFill>
-                  <a:srgbClr val="FFFFFF"/>
-                </a:solidFill>
-                <a:latin typeface="Verdana"/>
-              </a:rPr>
-              <a:t>Tsy tratry ny saina ny herinao</a:t>
-            </a:r>
-          </a:p>
-          <a:p>
-            <a:pPr algn="ctr"/>
-            <a:r>
-              <a:rPr lang="en-US" sz="4500" b="true">
-                <a:solidFill>
-                  <a:srgbClr val="FFFFFF"/>
-                </a:solidFill>
-                <a:latin typeface="Verdana"/>
-              </a:rPr>
-              <a:t>Ny fiderana 'zay entinay,</a:t>
-            </a:r>
-          </a:p>
-          <a:p>
-            <a:pPr algn="ctr"/>
-            <a:r>
-              <a:rPr lang="en-US" sz="4500" b="true">
-                <a:solidFill>
-                  <a:srgbClr val="FFFFFF"/>
-                </a:solidFill>
-                <a:latin typeface="Verdana"/>
-              </a:rPr>
-              <a:t>Raiso re ! Raiso re!</a:t>
-            </a:r>
-          </a:p>
-          <a:p>
-            <a:pPr algn="ctr"/>
-            <a:r>
-              <a:rPr lang="en-US" sz="4500" b="true">
-                <a:solidFill>
-                  <a:srgbClr val="FFFFFF"/>
-                </a:solidFill>
-                <a:latin typeface="Verdana"/>
-              </a:rPr>
-              <a:t>Ny haja atolotra Anao ety, Raiso izao !</a:t>
-            </a:r>
-          </a:p>
-        </p:txBody>
-      </p:sp>
     </p:spTree>
   </p:cSld>
   <p:clrMapOvr>
@@ -5700,135 +6940,6 @@
           </a:prstGeom>
         </p:spPr>
       </p:pic>
-      <p:sp>
-        <p:nvSpPr>
-          <p:cNvPr name="TextBox 3" id="3"/>
-          <p:cNvSpPr txBox="true"/>
-          <p:nvPr/>
-        </p:nvSpPr>
-        <p:spPr>
-          <a:xfrm>
-            <a:off x="4953000" y="-190500"/>
-            <a:ext cx="9525000" cy="762000"/>
-          </a:xfrm>
-          <a:prstGeom prst="rect">
-            <a:avLst/>
-          </a:prstGeom>
-        </p:spPr>
-        <p:txBody>
-          <a:bodyPr anchor="t" rtlCol="false"/>
-          <a:lstStyle/>
-          <a:p>
-            <a:pPr algn="l">
-              <a:defRPr/>
-            </a:pPr>
-            <a:r>
-              <a:rPr lang="fr-MG"/>
-              <a:t/>
-            </a:r>
-            <a:endParaRPr lang="en-US" sz="1100"/>
-          </a:p>
-          <a:p>
-            <a:pPr algn="l"/>
-            <a:r>
-              <a:rPr lang="en-US" sz="2900" b="true">
-                <a:solidFill>
-                  <a:srgbClr val="D1AC65"/>
-                </a:solidFill>
-                <a:latin typeface="Verdana"/>
-              </a:rPr>
-              <a:t>FIHIRANA 171 : 1, 3</a:t>
-            </a:r>
-          </a:p>
-        </p:txBody>
-      </p:sp>
-      <p:sp>
-        <p:nvSpPr>
-          <p:cNvPr name="TextBox 4" id="4"/>
-          <p:cNvSpPr txBox="true"/>
-          <p:nvPr/>
-        </p:nvSpPr>
-        <p:spPr>
-          <a:xfrm>
-            <a:off x="685800" y="508000"/>
-            <a:ext cx="10922000" cy="5080000"/>
-          </a:xfrm>
-          <a:prstGeom prst="rect">
-            <a:avLst/>
-          </a:prstGeom>
-        </p:spPr>
-        <p:txBody>
-          <a:bodyPr anchor="t" rtlCol="false"/>
-          <a:lstStyle/>
-          <a:p>
-            <a:pPr algn="l">
-              <a:defRPr/>
-            </a:pPr>
-            <a:r>
-              <a:rPr lang="fr-MG"/>
-              <a:t/>
-            </a:r>
-            <a:endParaRPr lang="en-US" sz="1100"/>
-          </a:p>
-          <a:p>
-            <a:pPr algn="ctr"/>
-            <a:r>
-              <a:rPr lang="en-US" sz="4500" b="true">
-                <a:solidFill>
-                  <a:srgbClr val="D1AC65"/>
-                </a:solidFill>
-                <a:latin typeface="Verdana"/>
-              </a:rPr>
-              <a:t>3- </a:t>
-            </a:r>
-            <a:r>
-              <a:rPr lang="en-US" sz="4500" b="true">
-                <a:solidFill>
-                  <a:srgbClr val="FFFFFF"/>
-                </a:solidFill>
-                <a:latin typeface="Verdana"/>
-              </a:rPr>
-              <a:t>Tompo, Mpanjaka Tsitoha,</a:t>
-            </a:r>
-          </a:p>
-          <a:p>
-            <a:pPr algn="ctr"/>
-            <a:r>
-              <a:rPr lang="en-US" sz="4500" b="true">
-                <a:solidFill>
-                  <a:srgbClr val="FFFFFF"/>
-                </a:solidFill>
-                <a:latin typeface="Verdana"/>
-              </a:rPr>
-              <a:t>Kanefa be indrafo;</a:t>
-            </a:r>
-          </a:p>
-          <a:p>
-            <a:pPr algn="ctr"/>
-            <a:r>
-              <a:rPr lang="en-US" sz="4500" b="true">
-                <a:solidFill>
-                  <a:srgbClr val="FFFFFF"/>
-                </a:solidFill>
-                <a:latin typeface="Verdana"/>
-              </a:rPr>
-              <a:t>Deraina eram-po erantsaina,</a:t>
-            </a:r>
-          </a:p>
-          <a:p>
-            <a:pPr algn="ctr"/>
-            <a:r>
-              <a:rPr lang="en-US" sz="4500" b="true">
-                <a:solidFill>
-                  <a:srgbClr val="FFFFFF"/>
-                </a:solidFill>
-                <a:latin typeface="Verdana"/>
-              </a:rPr>
-              <a:t>Deraina mandrakizay ;</a:t>
-            </a:r>
-          </a:p>
-        </p:txBody>
-      </p:sp>
     </p:spTree>
   </p:cSld>
   <p:clrMapOvr>
@@ -5878,126 +6989,6 @@
           </a:prstGeom>
         </p:spPr>
       </p:pic>
-      <p:sp>
-        <p:nvSpPr>
-          <p:cNvPr name="TextBox 3" id="3"/>
-          <p:cNvSpPr txBox="true"/>
-          <p:nvPr/>
-        </p:nvSpPr>
-        <p:spPr>
-          <a:xfrm>
-            <a:off x="4953000" y="-190500"/>
-            <a:ext cx="9525000" cy="762000"/>
-          </a:xfrm>
-          <a:prstGeom prst="rect">
-            <a:avLst/>
-          </a:prstGeom>
-        </p:spPr>
-        <p:txBody>
-          <a:bodyPr anchor="t" rtlCol="false"/>
-          <a:lstStyle/>
-          <a:p>
-            <a:pPr algn="l">
-              <a:defRPr/>
-            </a:pPr>
-            <a:r>
-              <a:rPr lang="fr-MG"/>
-              <a:t/>
-            </a:r>
-            <a:endParaRPr lang="en-US" sz="1100"/>
-          </a:p>
-          <a:p>
-            <a:pPr algn="l"/>
-            <a:r>
-              <a:rPr lang="en-US" sz="2900" b="true">
-                <a:solidFill>
-                  <a:srgbClr val="D1AC65"/>
-                </a:solidFill>
-                <a:latin typeface="Verdana"/>
-              </a:rPr>
-              <a:t>FIHIRANA 171 : 1, 3</a:t>
-            </a:r>
-          </a:p>
-        </p:txBody>
-      </p:sp>
-      <p:sp>
-        <p:nvSpPr>
-          <p:cNvPr name="TextBox 4" id="4"/>
-          <p:cNvSpPr txBox="true"/>
-          <p:nvPr/>
-        </p:nvSpPr>
-        <p:spPr>
-          <a:xfrm>
-            <a:off x="685800" y="508000"/>
-            <a:ext cx="10922000" cy="5080000"/>
-          </a:xfrm>
-          <a:prstGeom prst="rect">
-            <a:avLst/>
-          </a:prstGeom>
-        </p:spPr>
-        <p:txBody>
-          <a:bodyPr anchor="t" rtlCol="false"/>
-          <a:lstStyle/>
-          <a:p>
-            <a:pPr algn="l">
-              <a:defRPr/>
-            </a:pPr>
-            <a:r>
-              <a:rPr lang="fr-MG"/>
-              <a:t/>
-            </a:r>
-            <a:endParaRPr lang="en-US" sz="1100"/>
-          </a:p>
-          <a:p>
-            <a:pPr algn="ctr"/>
-            <a:r>
-              <a:rPr lang="en-US" sz="4500" b="true">
-                <a:solidFill>
-                  <a:srgbClr val="FFFFFF"/>
-                </a:solidFill>
-                <a:latin typeface="Verdana"/>
-              </a:rPr>
-              <a:t>He ! Ny mpanompo voavonjy</a:t>
-            </a:r>
-          </a:p>
-          <a:p>
-            <a:pPr algn="ctr"/>
-            <a:r>
-              <a:rPr lang="en-US" sz="4500" b="true">
-                <a:solidFill>
-                  <a:srgbClr val="FFFFFF"/>
-                </a:solidFill>
-                <a:latin typeface="Verdana"/>
-              </a:rPr>
-              <a:t>Samy mihoby hoe :</a:t>
-            </a:r>
-          </a:p>
-          <a:p>
-            <a:pPr algn="ctr"/>
-            <a:r>
-              <a:rPr lang="en-US" sz="4500" b="true">
-                <a:solidFill>
-                  <a:srgbClr val="FFFFFF"/>
-                </a:solidFill>
-                <a:latin typeface="Verdana"/>
-              </a:rPr>
-              <a:t>"Haleloia ho amin’ny Avo,</a:t>
-            </a:r>
-          </a:p>
-          <a:p>
-            <a:pPr algn="ctr"/>
-            <a:r>
-              <a:rPr lang="en-US" sz="4500" b="true">
-                <a:solidFill>
-                  <a:srgbClr val="FFFFFF"/>
-                </a:solidFill>
-                <a:latin typeface="Verdana"/>
-              </a:rPr>
-              <a:t>Fa Jeso no Tomponay "</a:t>
-            </a:r>
-          </a:p>
-        </p:txBody>
-      </p:sp>
     </p:spTree>
   </p:cSld>
   <p:clrMapOvr>
@@ -6047,126 +7038,6 @@
           </a:prstGeom>
         </p:spPr>
       </p:pic>
-      <p:sp>
-        <p:nvSpPr>
-          <p:cNvPr name="TextBox 3" id="3"/>
-          <p:cNvSpPr txBox="true"/>
-          <p:nvPr/>
-        </p:nvSpPr>
-        <p:spPr>
-          <a:xfrm>
-            <a:off x="4953000" y="-190500"/>
-            <a:ext cx="9525000" cy="762000"/>
-          </a:xfrm>
-          <a:prstGeom prst="rect">
-            <a:avLst/>
-          </a:prstGeom>
-        </p:spPr>
-        <p:txBody>
-          <a:bodyPr anchor="t" rtlCol="false"/>
-          <a:lstStyle/>
-          <a:p>
-            <a:pPr algn="l">
-              <a:defRPr/>
-            </a:pPr>
-            <a:r>
-              <a:rPr lang="fr-MG"/>
-              <a:t/>
-            </a:r>
-            <a:endParaRPr lang="en-US" sz="1100"/>
-          </a:p>
-          <a:p>
-            <a:pPr algn="l"/>
-            <a:r>
-              <a:rPr lang="en-US" sz="2900" b="true">
-                <a:solidFill>
-                  <a:srgbClr val="D1AC65"/>
-                </a:solidFill>
-                <a:latin typeface="Verdana"/>
-              </a:rPr>
-              <a:t>FIHIRANA 171 : 1, 3</a:t>
-            </a:r>
-          </a:p>
-        </p:txBody>
-      </p:sp>
-      <p:sp>
-        <p:nvSpPr>
-          <p:cNvPr name="TextBox 4" id="4"/>
-          <p:cNvSpPr txBox="true"/>
-          <p:nvPr/>
-        </p:nvSpPr>
-        <p:spPr>
-          <a:xfrm>
-            <a:off x="685800" y="508000"/>
-            <a:ext cx="10922000" cy="5080000"/>
-          </a:xfrm>
-          <a:prstGeom prst="rect">
-            <a:avLst/>
-          </a:prstGeom>
-        </p:spPr>
-        <p:txBody>
-          <a:bodyPr anchor="t" rtlCol="false"/>
-          <a:lstStyle/>
-          <a:p>
-            <a:pPr algn="l">
-              <a:defRPr/>
-            </a:pPr>
-            <a:r>
-              <a:rPr lang="fr-MG"/>
-              <a:t/>
-            </a:r>
-            <a:endParaRPr lang="en-US" sz="1100"/>
-          </a:p>
-          <a:p>
-            <a:pPr algn="ctr"/>
-            <a:r>
-              <a:rPr lang="en-US" sz="4500" b="true">
-                <a:solidFill>
-                  <a:srgbClr val="FFFFFF"/>
-                </a:solidFill>
-                <a:latin typeface="Verdana"/>
-              </a:rPr>
-              <a:t>Ry Tompo Mpanjaka mahery ô!</a:t>
-            </a:r>
-          </a:p>
-          <a:p>
-            <a:pPr algn="ctr"/>
-            <a:r>
-              <a:rPr lang="en-US" sz="4500" b="true">
-                <a:solidFill>
-                  <a:srgbClr val="FFFFFF"/>
-                </a:solidFill>
-                <a:latin typeface="Verdana"/>
-              </a:rPr>
-              <a:t>Mihainoa ! Mihainoa !</a:t>
-            </a:r>
-          </a:p>
-          <a:p>
-            <a:pPr algn="ctr"/>
-            <a:r>
-              <a:rPr lang="en-US" sz="4500" b="true">
-                <a:solidFill>
-                  <a:srgbClr val="FFFFFF"/>
-                </a:solidFill>
-                <a:latin typeface="Verdana"/>
-              </a:rPr>
-              <a:t>Avy manaiky tokoa 'zahay</a:t>
-            </a:r>
-          </a:p>
-          <a:p>
-            <a:pPr algn="ctr"/>
-            <a:r>
-              <a:rPr lang="en-US" sz="4500" b="true">
-                <a:solidFill>
-                  <a:srgbClr val="FFFFFF"/>
-                </a:solidFill>
-                <a:latin typeface="Verdana"/>
-              </a:rPr>
-              <a:t>Fa Tompon'ny hery rehetra Hianao,</a:t>
-            </a:r>
-          </a:p>
-        </p:txBody>
-      </p:sp>
     </p:spTree>
   </p:cSld>
   <p:clrMapOvr>
@@ -6216,138 +7087,6 @@
           </a:prstGeom>
         </p:spPr>
       </p:pic>
-      <p:sp>
-        <p:nvSpPr>
-          <p:cNvPr name="TextBox 3" id="3"/>
-          <p:cNvSpPr txBox="true"/>
-          <p:nvPr/>
-        </p:nvSpPr>
-        <p:spPr>
-          <a:xfrm>
-            <a:off x="4953000" y="-190500"/>
-            <a:ext cx="9525000" cy="762000"/>
-          </a:xfrm>
-          <a:prstGeom prst="rect">
-            <a:avLst/>
-          </a:prstGeom>
-        </p:spPr>
-        <p:txBody>
-          <a:bodyPr anchor="t" rtlCol="false"/>
-          <a:lstStyle/>
-          <a:p>
-            <a:pPr algn="l">
-              <a:defRPr/>
-            </a:pPr>
-            <a:r>
-              <a:rPr lang="fr-MG"/>
-              <a:t/>
-            </a:r>
-            <a:endParaRPr lang="en-US" sz="1100"/>
-          </a:p>
-          <a:p>
-            <a:pPr algn="l"/>
-            <a:r>
-              <a:rPr lang="en-US" sz="2900" b="true">
-                <a:solidFill>
-                  <a:srgbClr val="D1AC65"/>
-                </a:solidFill>
-                <a:latin typeface="Verdana"/>
-              </a:rPr>
-              <a:t>FIHIRANA 171 : 1, 3</a:t>
-            </a:r>
-          </a:p>
-        </p:txBody>
-      </p:sp>
-      <p:sp>
-        <p:nvSpPr>
-          <p:cNvPr name="TextBox 4" id="4"/>
-          <p:cNvSpPr txBox="true"/>
-          <p:nvPr/>
-        </p:nvSpPr>
-        <p:spPr>
-          <a:xfrm>
-            <a:off x="685800" y="508000"/>
-            <a:ext cx="10922000" cy="5080000"/>
-          </a:xfrm>
-          <a:prstGeom prst="rect">
-            <a:avLst/>
-          </a:prstGeom>
-        </p:spPr>
-        <p:txBody>
-          <a:bodyPr anchor="t" rtlCol="false"/>
-          <a:lstStyle/>
-          <a:p>
-            <a:pPr algn="l">
-              <a:defRPr/>
-            </a:pPr>
-            <a:r>
-              <a:rPr lang="fr-MG"/>
-              <a:t/>
-            </a:r>
-            <a:endParaRPr lang="en-US" sz="1100"/>
-          </a:p>
-          <a:p>
-            <a:pPr algn="ctr"/>
-            <a:r>
-              <a:rPr lang="en-US" sz="4500" b="true">
-                <a:solidFill>
-                  <a:srgbClr val="FFFFFF"/>
-                </a:solidFill>
-                <a:latin typeface="Verdana"/>
-              </a:rPr>
-              <a:t>Tsy misy mihitsy ny toa Anao,</a:t>
-            </a:r>
-          </a:p>
-          <a:p>
-            <a:pPr algn="ctr"/>
-            <a:r>
-              <a:rPr lang="en-US" sz="4500" b="true">
-                <a:solidFill>
-                  <a:srgbClr val="FFFFFF"/>
-                </a:solidFill>
-                <a:latin typeface="Verdana"/>
-              </a:rPr>
-              <a:t>Tsy tratry ny saina ny herinao</a:t>
-            </a:r>
-          </a:p>
-          <a:p>
-            <a:pPr algn="ctr"/>
-            <a:r>
-              <a:rPr lang="en-US" sz="4500" b="true">
-                <a:solidFill>
-                  <a:srgbClr val="FFFFFF"/>
-                </a:solidFill>
-                <a:latin typeface="Verdana"/>
-              </a:rPr>
-              <a:t>Ny fiderana 'zay entinay,</a:t>
-            </a:r>
-          </a:p>
-          <a:p>
-            <a:pPr algn="ctr"/>
-            <a:r>
-              <a:rPr lang="en-US" sz="4500" b="true">
-                <a:solidFill>
-                  <a:srgbClr val="FFFFFF"/>
-                </a:solidFill>
-                <a:latin typeface="Verdana"/>
-              </a:rPr>
-              <a:t>Raiso re ! Raiso re!</a:t>
-            </a:r>
-          </a:p>
-          <a:p>
-            <a:pPr algn="ctr"/>
-            <a:r>
-              <a:rPr lang="en-US" sz="4500" b="true">
-                <a:solidFill>
-                  <a:srgbClr val="FFFFFF"/>
-                </a:solidFill>
-                <a:latin typeface="Verdana"/>
-              </a:rPr>
-              <a:t>Ny haja atolotra Anao ety, Raiso izao !</a:t>
-            </a:r>
-          </a:p>
-        </p:txBody>
-      </p:sp>
     </p:spTree>
   </p:cSld>
   <p:clrMapOvr>
@@ -6397,195 +7136,6 @@
           </a:prstGeom>
         </p:spPr>
       </p:pic>
-      <p:sp>
-        <p:nvSpPr>
-          <p:cNvPr name="TextBox 3" id="3"/>
-          <p:cNvSpPr txBox="true"/>
-          <p:nvPr/>
-        </p:nvSpPr>
-        <p:spPr>
-          <a:xfrm>
-            <a:off x="4953000" y="-190500"/>
-            <a:ext cx="9525000" cy="762000"/>
-          </a:xfrm>
-          <a:prstGeom prst="rect">
-            <a:avLst/>
-          </a:prstGeom>
-        </p:spPr>
-        <p:txBody>
-          <a:bodyPr anchor="t" rtlCol="false"/>
-          <a:lstStyle/>
-          <a:p>
-            <a:pPr algn="l">
-              <a:defRPr/>
-            </a:pPr>
-            <a:r>
-              <a:rPr lang="fr-MG"/>
-              <a:t/>
-            </a:r>
-            <a:endParaRPr lang="en-US" sz="1100"/>
-          </a:p>
-          <a:p>
-            <a:pPr algn="l"/>
-            <a:r>
-              <a:rPr lang="en-US" sz="2900" b="true">
-                <a:solidFill>
-                  <a:srgbClr val="D1AC65"/>
-                </a:solidFill>
-                <a:latin typeface="Verdana"/>
-              </a:rPr>
-              <a:t>FIHIRANA FANAMPINY 16 : 1</a:t>
-            </a:r>
-          </a:p>
-        </p:txBody>
-      </p:sp>
-      <p:sp>
-        <p:nvSpPr>
-          <p:cNvPr name="TextBox 4" id="4"/>
-          <p:cNvSpPr txBox="true"/>
-          <p:nvPr/>
-        </p:nvSpPr>
-        <p:spPr>
-          <a:xfrm>
-            <a:off x="685800" y="508000"/>
-            <a:ext cx="10922000" cy="5080000"/>
-          </a:xfrm>
-          <a:prstGeom prst="rect">
-            <a:avLst/>
-          </a:prstGeom>
-        </p:spPr>
-        <p:txBody>
-          <a:bodyPr anchor="t" rtlCol="false"/>
-          <a:lstStyle/>
-          <a:p>
-            <a:pPr algn="l">
-              <a:defRPr/>
-            </a:pPr>
-            <a:r>
-              <a:rPr lang="fr-MG"/>
-              <a:t/>
-            </a:r>
-            <a:endParaRPr lang="en-US" sz="1100"/>
-          </a:p>
-          <a:p>
-            <a:pPr algn="ctr"/>
-            <a:r>
-              <a:rPr lang="en-US" sz="4500" b="true">
-                <a:solidFill>
-                  <a:srgbClr val="D1AC65"/>
-                </a:solidFill>
-                <a:latin typeface="Verdana"/>
-              </a:rPr>
-              <a:t>1- </a:t>
-            </a:r>
-            <a:r>
-              <a:rPr lang="en-US" sz="4500" b="true">
-                <a:solidFill>
-                  <a:srgbClr val="FFFFFF"/>
-                </a:solidFill>
-                <a:latin typeface="Verdana"/>
-              </a:rPr>
-              <a:t>Tsy vitam-po onena</a:t>
-            </a:r>
-          </a:p>
-          <a:p>
-            <a:pPr algn="ctr"/>
-            <a:r>
-              <a:rPr lang="en-US" sz="4500" b="true">
-                <a:solidFill>
-                  <a:srgbClr val="FFFFFF"/>
-                </a:solidFill>
-                <a:latin typeface="Verdana"/>
-              </a:rPr>
-              <a:t>Tsy vitan-dranomaso</a:t>
-            </a:r>
-          </a:p>
-          <a:p>
-            <a:pPr algn="ctr"/>
-            <a:r>
-              <a:rPr lang="en-US" sz="4500" b="true">
-                <a:solidFill>
-                  <a:srgbClr val="FFFFFF"/>
-                </a:solidFill>
-                <a:latin typeface="Verdana"/>
-              </a:rPr>
-              <a:t>Ny Asam-pamonjena</a:t>
-            </a:r>
-          </a:p>
-          <a:p>
-            <a:pPr algn="ctr"/>
-            <a:r>
-              <a:rPr lang="en-US" sz="4500" b="true">
-                <a:solidFill>
-                  <a:srgbClr val="FFFFFF"/>
-                </a:solidFill>
-                <a:latin typeface="Verdana"/>
-              </a:rPr>
-              <a:t>Tsy azo atao</a:t>
-            </a:r>
-          </a:p>
-          <a:p>
-            <a:pPr algn="ctr"/>
-            <a:r>
-              <a:rPr lang="en-US" sz="4500" b="true">
-                <a:solidFill>
-                  <a:srgbClr val="FFFFFF"/>
-                </a:solidFill>
-                <a:latin typeface="Verdana"/>
-              </a:rPr>
-              <a:t>Mifampiandry andraso</a:t>
-            </a:r>
-          </a:p>
-          <a:p>
-            <a:pPr algn="ctr"/>
-            <a:r>
-              <a:rPr lang="en-US" sz="4500" b="true">
-                <a:solidFill>
-                  <a:srgbClr val="FFFFFF"/>
-                </a:solidFill>
-                <a:latin typeface="Verdana"/>
-              </a:rPr>
-              <a:t>Tsy azo ifanerena</a:t>
-            </a:r>
-          </a:p>
-          <a:p>
-            <a:pPr algn="ctr"/>
-            <a:r>
-              <a:rPr lang="en-US" sz="4500" b="true">
-                <a:solidFill>
-                  <a:srgbClr val="FFFFFF"/>
-                </a:solidFill>
-                <a:latin typeface="Verdana"/>
-              </a:rPr>
-              <a:t>Mila fandavan-tena</a:t>
-            </a:r>
-          </a:p>
-          <a:p>
-            <a:pPr algn="ctr"/>
-            <a:r>
-              <a:rPr lang="en-US" sz="4500" b="true">
-                <a:solidFill>
-                  <a:srgbClr val="FFFFFF"/>
-                </a:solidFill>
-                <a:latin typeface="Verdana"/>
-              </a:rPr>
-              <a:t>Sy hery tsy mba maty</a:t>
-            </a:r>
-          </a:p>
-          <a:p>
-            <a:pPr algn="ctr"/>
-            <a:r>
-              <a:rPr lang="en-US" sz="4500" b="true">
-                <a:solidFill>
-                  <a:srgbClr val="FFFFFF"/>
-                </a:solidFill>
-                <a:latin typeface="Verdana"/>
-              </a:rPr>
-              <a:t>Herim-po, herin-tsaina koa</a:t>
-            </a:r>
-          </a:p>
-        </p:txBody>
-      </p:sp>
     </p:spTree>
   </p:cSld>
   <p:clrMapOvr>
